--- a/Week1_DataScience_Project/Presentation.pptx
+++ b/Week1_DataScience_Project/Presentation.pptx
@@ -4,6 +4,9 @@
   <p:sldMasterIdLst>
     <p:sldMasterId id="2147483648" r:id="rId1"/>
   </p:sldMasterIdLst>
+  <p:notesMasterIdLst>
+    <p:notesMasterId r:id="rId15"/>
+  </p:notesMasterIdLst>
   <p:sldIdLst>
     <p:sldId id="256" r:id="rId2"/>
     <p:sldId id="257" r:id="rId3"/>
@@ -19,10 +22,7 @@
     <p:sldId id="267" r:id="rId13"/>
     <p:sldId id="268" r:id="rId14"/>
   </p:sldIdLst>
-  <p:notesMasterIdLst>
-    <p:notesMasterId r:id="rId15"/>
-  </p:notesMasterIdLst>
-  <p:sldSz cx="9144000" cy="5143500"/>
+  <p:sldSz cx="9144000" cy="5143500" type="screen16x9"/>
   <p:notesSz cx="5143500" cy="9144000"/>
   <p:defaultTextStyle>
     <a:lvl1pPr marL="0" algn="l" defTabSz="914400" rtl="0" eaLnBrk="1" latinLnBrk="0" hangingPunct="1">
@@ -119,18 +119,18 @@
   <p:extLst>
     <p:ext uri="{521415D9-36F7-43E2-AB2F-B90AF26B5E84}">
       <p14:sectionLst xmlns:p14="http://schemas.microsoft.com/office/powerpoint/2010/main">
-        <p14:section name="Introduction" id="{784b8b44-3833-5a4d-f5a7-62a22a4f35e4}">
+        <p14:section name="Introduction" id="{784B8B44-3833-5A4D-F5A7-62A22A4F35E4}">
           <p14:sldIdLst>
             <p14:sldId id="256"/>
             <p14:sldId id="257"/>
           </p14:sldIdLst>
         </p14:section>
-        <p14:section name="Data and cleaning" id="{a41e67a4-4399-0023-dfbd-1a8faf5e79fe}">
+        <p14:section name="Data and cleaning" id="{A41E67A4-4399-0023-DFBD-1A8FAF5E79FE}">
           <p14:sldIdLst>
             <p14:sldId id="258"/>
           </p14:sldIdLst>
         </p14:section>
-        <p14:section name="Findings" id="{a51f6851-ff26-66f3-d688-d5db989ef90a}">
+        <p14:section name="Findings" id="{A51F6851-FF26-66F3-D688-D5DB989EF90A}">
           <p14:sldIdLst>
             <p14:sldId id="259"/>
             <p14:sldId id="260"/>
@@ -141,7 +141,7 @@
             <p14:sldId id="265"/>
           </p14:sldIdLst>
         </p14:section>
-        <p14:section name="Next steps" id="{9ee96fea-6db3-3b67-5d33-fc0fb71c6458}">
+        <p14:section name="Next steps" id="{9EE96FEA-6DB3-3B67-5D33-FC0FB71C6458}">
           <p14:sldIdLst>
             <p14:sldId id="266"/>
             <p14:sldId id="267"/>
@@ -157,10 +157,41 @@
 </p:presentation>
 </file>
 
+<file path=ppt/changesInfos/changesInfo1.xml><?xml version="1.0" encoding="utf-8"?>
+<pc:chgInfo xmlns:a="http://schemas.openxmlformats.org/drawingml/2006/main" xmlns:r="http://schemas.openxmlformats.org/officeDocument/2006/relationships" xmlns:ac="http://schemas.microsoft.com/office/drawing/2013/main/command" xmlns:pc="http://schemas.microsoft.com/office/powerpoint/2013/main/command">
+  <pc:docChgLst>
+    <pc:chgData name="MOLEMI MOLOKOANE" userId="c084cf2b6ed417bc" providerId="LiveId" clId="{8DDE6D54-7BD7-43C7-88F9-B4F402B10CE8}"/>
+    <pc:docChg chg="modSld">
+      <pc:chgData name="MOLEMI MOLOKOANE" userId="c084cf2b6ed417bc" providerId="LiveId" clId="{8DDE6D54-7BD7-43C7-88F9-B4F402B10CE8}" dt="2026-10-17T07:47:51.924" v="0" actId="1076"/>
+      <pc:docMkLst>
+        <pc:docMk/>
+      </pc:docMkLst>
+      <pc:sldChg chg="modSp mod">
+        <pc:chgData name="MOLEMI MOLOKOANE" userId="c084cf2b6ed417bc" providerId="LiveId" clId="{8DDE6D54-7BD7-43C7-88F9-B4F402B10CE8}" dt="2026-10-17T07:47:51.924" v="0" actId="1076"/>
+        <pc:sldMkLst>
+          <pc:docMk/>
+          <pc:sldMk cId="0" sldId="257"/>
+        </pc:sldMkLst>
+        <pc:spChg chg="mod">
+          <ac:chgData name="MOLEMI MOLOKOANE" userId="c084cf2b6ed417bc" providerId="LiveId" clId="{8DDE6D54-7BD7-43C7-88F9-B4F402B10CE8}" dt="2026-10-17T07:47:51.924" v="0" actId="1076"/>
+          <ac:spMkLst>
+            <pc:docMk/>
+            <pc:sldMk cId="0" sldId="257"/>
+            <ac:spMk id="7" creationId="{00000000-0000-0000-0000-000000000000}"/>
+          </ac:spMkLst>
+        </pc:spChg>
+      </pc:sldChg>
+    </pc:docChg>
+  </pc:docChgLst>
+</pc:chgInfo>
+</file>
+
 <file path=ppt/charts/chart1.xml><?xml version="1.0" encoding="utf-8"?>
-<c:chartSpace xmlns:c="http://schemas.openxmlformats.org/drawingml/2006/chart" xmlns:a="http://schemas.openxmlformats.org/drawingml/2006/main" xmlns:r="http://schemas.openxmlformats.org/officeDocument/2006/relationships">
+<c:chartSpace xmlns:c="http://schemas.openxmlformats.org/drawingml/2006/chart" xmlns:a="http://schemas.openxmlformats.org/drawingml/2006/main" xmlns:r="http://schemas.openxmlformats.org/officeDocument/2006/relationships" xmlns:c16r2="http://schemas.microsoft.com/office/drawing/2015/06/chart">
   <c:date1904 val="0"/>
+  <c:lang val="en-US"/>
   <c:roundedCorners val="1"/>
+  <c:style val="2"/>
   <c:chart>
     <c:title>
       <c:tx>
@@ -177,7 +208,7 @@
               </a:defRPr>
             </a:pPr>
             <a:r>
-              <a:rPr sz="1200" b="0" i="0" u="none" strike="noStrike">
+              <a:rPr lang="en-US" sz="1200" b="0" i="0" u="none" strike="noStrike">
                 <a:solidFill>
                   <a:srgbClr val="1B1F1D"/>
                 </a:solidFill>
@@ -188,7 +219,6 @@
           </a:p>
         </c:rich>
       </c:tx>
-      <c:layout/>
       <c:overlay val="0"/>
     </c:title>
     <c:autoTitleDeleted val="0"/>
@@ -220,19 +250,27 @@
           </c:spPr>
           <c:invertIfNegative val="0"/>
           <c:dLbls>
-            <c:numFmt formatCode="₦0&quot;M&quot;" sourceLinked="0"/>
+            <c:numFmt formatCode="\₦0&quot;M&quot;" sourceLinked="0"/>
+            <c:spPr>
+              <a:noFill/>
+              <a:ln>
+                <a:noFill/>
+              </a:ln>
+              <a:effectLst/>
+            </c:spPr>
             <c:txPr>
               <a:bodyPr/>
               <a:lstStyle/>
               <a:p>
                 <a:pPr>
-                  <a:defRPr b="0" i="0" strike="noStrike" sz="1000" u="none">
+                  <a:defRPr sz="1000" b="0" i="0" u="none" strike="noStrike">
                     <a:solidFill>
                       <a:srgbClr val="1B1F1D"/>
                     </a:solidFill>
                     <a:latin typeface="+mn-lt"/>
                   </a:defRPr>
                 </a:pPr>
+                <a:endParaRPr lang="en-US"/>
               </a:p>
             </c:txPr>
             <c:showLegendKey val="0"/>
@@ -242,25 +280,28 @@
             <c:showPercent val="0"/>
             <c:showBubbleSize val="0"/>
             <c:showLeaderLines val="0"/>
+            <c:extLst>
+              <c:ext xmlns:c15="http://schemas.microsoft.com/office/drawing/2012/chart" uri="{CE6537A1-D6FC-4f65-9D91-7224C49458BB}">
+                <c15:showLeaderLines val="0"/>
+              </c:ext>
+            </c:extLst>
           </c:dLbls>
           <c:cat>
-            <c:multiLvlStrRef>
+            <c:strRef>
               <c:f>Sheet1!$A$2:$A$4</c:f>
-              <c:multiLvlStrCache>
+              <c:strCache>
                 <c:ptCount val="3"/>
-                <c:lvl>
-                  <c:pt idx="0">
-                    <c:v>Completed</c:v>
-                  </c:pt>
-                  <c:pt idx="1">
-                    <c:v>Pending</c:v>
-                  </c:pt>
-                  <c:pt idx="2">
-                    <c:v>Cancelled</c:v>
-                  </c:pt>
-                </c:lvl>
-              </c:multiLvlStrCache>
-            </c:multiLvlStrRef>
+                <c:pt idx="0">
+                  <c:v>Completed</c:v>
+                </c:pt>
+                <c:pt idx="1">
+                  <c:v>Pending</c:v>
+                </c:pt>
+                <c:pt idx="2">
+                  <c:v>Cancelled</c:v>
+                </c:pt>
+              </c:strCache>
+            </c:strRef>
           </c:cat>
           <c:val>
             <c:numRef>
@@ -280,36 +321,23 @@
               </c:numCache>
             </c:numRef>
           </c:val>
+          <c:extLst>
+            <c:ext xmlns:c16="http://schemas.microsoft.com/office/drawing/2014/chart" uri="{C3380CC4-5D6E-409C-BE32-E72D297353CC}">
+              <c16:uniqueId val="{00000000-F3BA-4656-A425-897810CF6325}"/>
+            </c:ext>
+          </c:extLst>
         </c:ser>
         <c:dLbls>
-          <c:numFmt formatCode="₦0&quot;M&quot;" sourceLinked="0"/>
-          <c:txPr>
-            <a:bodyPr/>
-            <a:lstStyle/>
-            <a:p>
-              <a:pPr>
-                <a:defRPr b="0" i="0" strike="noStrike" sz="1000" u="none">
-                  <a:solidFill>
-                    <a:srgbClr val="1B1F1D"/>
-                  </a:solidFill>
-                  <a:latin typeface="+mn-lt"/>
-                </a:defRPr>
-              </a:pPr>
-            </a:p>
-          </c:txPr>
           <c:showLegendKey val="0"/>
           <c:showVal val="1"/>
           <c:showCatName val="0"/>
           <c:showSerName val="0"/>
           <c:showPercent val="0"/>
           <c:showBubbleSize val="0"/>
-          <c:showLeaderLines val="0"/>
         </c:dLbls>
         <c:gapWidth val="60"/>
-        <c:overlap val="0"/>
         <c:axId val="2094734554"/>
         <c:axId val="2094734552"/>
-        <c:axId val="2094734556"/>
       </c:barChart>
       <c:catAx>
         <c:axId val="2094734554"/>
@@ -348,6 +376,7 @@
         <c:crosses val="autoZero"/>
         <c:auto val="1"/>
         <c:lblAlgn val="ctr"/>
+        <c:lblOffset val="100"/>
         <c:noMultiLvlLbl val="1"/>
       </c:catAx>
       <c:valAx>
@@ -362,28 +391,6 @@
         <c:majorTickMark val="out"/>
         <c:minorTickMark val="none"/>
         <c:tickLblPos val="nextTo"/>
-        <c:spPr>
-          <a:ln w="12700" cap="flat">
-            <a:noFill/>
-            <a:prstDash val="solid"/>
-            <a:round/>
-          </a:ln>
-        </c:spPr>
-        <c:txPr>
-          <a:bodyPr/>
-          <a:lstStyle/>
-          <a:p>
-            <a:pPr>
-              <a:defRPr sz="1000" b="0" i="0" u="none" strike="noStrike">
-                <a:solidFill>
-                  <a:srgbClr val="52514E"/>
-                </a:solidFill>
-                <a:latin typeface="+mn-lt"/>
-              </a:defRPr>
-            </a:pPr>
-            <a:endParaRPr lang="en-US"/>
-          </a:p>
-        </c:txPr>
         <c:crossAx val="2094734554"/>
         <c:crosses val="autoZero"/>
         <c:crossBetween val="between"/>
@@ -398,6 +405,7 @@
     </c:plotArea>
     <c:plotVisOnly val="1"/>
     <c:dispBlanksAs val="span"/>
+    <c:showDLblsOverMax val="1"/>
   </c:chart>
   <c:spPr>
     <a:noFill/>
@@ -413,9 +421,11 @@
 </file>
 
 <file path=ppt/charts/chart2.xml><?xml version="1.0" encoding="utf-8"?>
-<c:chartSpace xmlns:c="http://schemas.openxmlformats.org/drawingml/2006/chart" xmlns:a="http://schemas.openxmlformats.org/drawingml/2006/main" xmlns:r="http://schemas.openxmlformats.org/officeDocument/2006/relationships">
+<c:chartSpace xmlns:c="http://schemas.openxmlformats.org/drawingml/2006/chart" xmlns:a="http://schemas.openxmlformats.org/drawingml/2006/main" xmlns:r="http://schemas.openxmlformats.org/officeDocument/2006/relationships" xmlns:c16r2="http://schemas.microsoft.com/office/drawing/2015/06/chart">
   <c:date1904 val="0"/>
+  <c:lang val="en-US"/>
   <c:roundedCorners val="1"/>
+  <c:style val="2"/>
   <c:chart>
     <c:title>
       <c:tx>
@@ -432,7 +442,7 @@
               </a:defRPr>
             </a:pPr>
             <a:r>
-              <a:rPr sz="1200" b="0" i="0" u="none" strike="noStrike">
+              <a:rPr lang="en-US" sz="1200" b="0" i="0" u="none" strike="noStrike">
                 <a:solidFill>
                   <a:srgbClr val="1B1F1D"/>
                 </a:solidFill>
@@ -443,13 +453,13 @@
           </a:p>
         </c:rich>
       </c:tx>
-      <c:layout/>
       <c:overlay val="0"/>
     </c:title>
     <c:autoTitleDeleted val="0"/>
     <c:plotArea>
       <c:layout/>
       <c:lineChart>
+        <c:grouping val="standard"/>
         <c:varyColors val="0"/>
         <c:ser>
           <c:idx val="0"/>
@@ -466,9 +476,6 @@
             </c:strRef>
           </c:tx>
           <c:spPr>
-            <a:solidFill>
-              <a:srgbClr val="0F7B5A"/>
-            </a:solidFill>
             <a:ln w="31750" cap="flat">
               <a:solidFill>
                 <a:srgbClr val="0F7B5A"/>
@@ -478,31 +485,6 @@
             </a:ln>
             <a:effectLst/>
           </c:spPr>
-          <c:invertIfNegative val="0"/>
-          <c:dLbls>
-            <c:numFmt formatCode="#,##0" sourceLinked="0"/>
-            <c:txPr>
-              <a:bodyPr/>
-              <a:lstStyle/>
-              <a:p>
-                <a:pPr>
-                  <a:defRPr b="0" i="0" strike="noStrike" sz="1000" u="none">
-                    <a:solidFill>
-                      <a:srgbClr val="1B1F1D"/>
-                    </a:solidFill>
-                    <a:latin typeface="+mn-lt"/>
-                  </a:defRPr>
-                </a:pPr>
-              </a:p>
-            </c:txPr>
-            <c:showLegendKey val="0"/>
-            <c:showVal val="0"/>
-            <c:showCatName val="0"/>
-            <c:showSerName val="0"/>
-            <c:showPercent val="0"/>
-            <c:showBubbleSize val="0"/>
-            <c:showLeaderLines val="0"/>
-          </c:dLbls>
           <c:marker>
             <c:symbol val="circle"/>
             <c:size val="7"/>
@@ -521,50 +503,48 @@
             </c:spPr>
           </c:marker>
           <c:cat>
-            <c:multiLvlStrRef>
+            <c:strRef>
               <c:f>Sheet1!$A$2:$A$13</c:f>
-              <c:multiLvlStrCache>
+              <c:strCache>
                 <c:ptCount val="12"/>
-                <c:lvl>
-                  <c:pt idx="0">
-                    <c:v>Jan</c:v>
-                  </c:pt>
-                  <c:pt idx="1">
-                    <c:v>Feb</c:v>
-                  </c:pt>
-                  <c:pt idx="2">
-                    <c:v>Mar</c:v>
-                  </c:pt>
-                  <c:pt idx="3">
-                    <c:v>Apr</c:v>
-                  </c:pt>
-                  <c:pt idx="4">
-                    <c:v>May</c:v>
-                  </c:pt>
-                  <c:pt idx="5">
-                    <c:v>Jun</c:v>
-                  </c:pt>
-                  <c:pt idx="6">
-                    <c:v>Jul</c:v>
-                  </c:pt>
-                  <c:pt idx="7">
-                    <c:v>Aug</c:v>
-                  </c:pt>
-                  <c:pt idx="8">
-                    <c:v>Sep</c:v>
-                  </c:pt>
-                  <c:pt idx="9">
-                    <c:v>Oct</c:v>
-                  </c:pt>
-                  <c:pt idx="10">
-                    <c:v>Nov</c:v>
-                  </c:pt>
-                  <c:pt idx="11">
-                    <c:v>Dec</c:v>
-                  </c:pt>
-                </c:lvl>
-              </c:multiLvlStrCache>
-            </c:multiLvlStrRef>
+                <c:pt idx="0">
+                  <c:v>Jan</c:v>
+                </c:pt>
+                <c:pt idx="1">
+                  <c:v>Feb</c:v>
+                </c:pt>
+                <c:pt idx="2">
+                  <c:v>Mar</c:v>
+                </c:pt>
+                <c:pt idx="3">
+                  <c:v>Apr</c:v>
+                </c:pt>
+                <c:pt idx="4">
+                  <c:v>May</c:v>
+                </c:pt>
+                <c:pt idx="5">
+                  <c:v>Jun</c:v>
+                </c:pt>
+                <c:pt idx="6">
+                  <c:v>Jul</c:v>
+                </c:pt>
+                <c:pt idx="7">
+                  <c:v>Aug</c:v>
+                </c:pt>
+                <c:pt idx="8">
+                  <c:v>Sep</c:v>
+                </c:pt>
+                <c:pt idx="9">
+                  <c:v>Oct</c:v>
+                </c:pt>
+                <c:pt idx="10">
+                  <c:v>Nov</c:v>
+                </c:pt>
+                <c:pt idx="11">
+                  <c:v>Dec</c:v>
+                </c:pt>
+              </c:strCache>
+            </c:strRef>
           </c:cat>
           <c:val>
             <c:numRef>
@@ -588,59 +568,48 @@
                   <c:v>183.02936269999998</c:v>
                 </c:pt>
                 <c:pt idx="5">
-                  <c:v>174.64912965</c:v>
+                  <c:v>174.64912964999999</c:v>
                 </c:pt>
                 <c:pt idx="6">
                   <c:v>187.9647971</c:v>
                 </c:pt>
                 <c:pt idx="7">
-                  <c:v>183.39482635</c:v>
+                  <c:v>183.39482634999999</c:v>
                 </c:pt>
                 <c:pt idx="8">
                   <c:v>186.06685769999999</c:v>
                 </c:pt>
                 <c:pt idx="9">
-                  <c:v>197.4026366</c:v>
+                  <c:v>197.40263659999999</c:v>
                 </c:pt>
                 <c:pt idx="10">
                   <c:v>187.66912159999998</c:v>
                 </c:pt>
                 <c:pt idx="11">
-                  <c:v>201.03874075</c:v>
+                  <c:v>201.03874074999999</c:v>
                 </c:pt>
               </c:numCache>
             </c:numRef>
           </c:val>
           <c:smooth val="0"/>
+          <c:extLst>
+            <c:ext xmlns:c16="http://schemas.microsoft.com/office/drawing/2014/chart" uri="{C3380CC4-5D6E-409C-BE32-E72D297353CC}">
+              <c16:uniqueId val="{00000000-D982-4433-A0F0-8CD6E89FABA5}"/>
+            </c:ext>
+          </c:extLst>
         </c:ser>
         <c:dLbls>
-          <c:numFmt formatCode="#,##0" sourceLinked="0"/>
-          <c:txPr>
-            <a:bodyPr/>
-            <a:lstStyle/>
-            <a:p>
-              <a:pPr>
-                <a:defRPr b="0" i="0" strike="noStrike" sz="1000" u="none">
-                  <a:solidFill>
-                    <a:srgbClr val="1B1F1D"/>
-                  </a:solidFill>
-                  <a:latin typeface="+mn-lt"/>
-                </a:defRPr>
-              </a:pPr>
-            </a:p>
-          </c:txPr>
           <c:showLegendKey val="0"/>
           <c:showVal val="0"/>
           <c:showCatName val="0"/>
           <c:showSerName val="0"/>
           <c:showPercent val="0"/>
           <c:showBubbleSize val="0"/>
-          <c:showLeaderLines val="0"/>
         </c:dLbls>
         <c:marker val="1"/>
+        <c:smooth val="0"/>
         <c:axId val="2094734554"/>
         <c:axId val="2094734552"/>
-        <c:axId val="2094734556"/>
       </c:lineChart>
       <c:catAx>
         <c:axId val="2094734554"/>
@@ -679,6 +648,7 @@
         <c:crosses val="autoZero"/>
         <c:auto val="1"/>
         <c:lblAlgn val="ctr"/>
+        <c:lblOffset val="100"/>
         <c:noMultiLvlLbl val="1"/>
       </c:catAx>
       <c:valAx>
@@ -701,7 +671,7 @@
             </a:ln>
           </c:spPr>
         </c:majorGridlines>
-        <c:numFmt formatCode="₦0&quot;M&quot;" sourceLinked="0"/>
+        <c:numFmt formatCode="\₦0&quot;M&quot;" sourceLinked="0"/>
         <c:majorTickMark val="out"/>
         <c:minorTickMark val="none"/>
         <c:tickLblPos val="nextTo"/>
@@ -741,6 +711,7 @@
     </c:plotArea>
     <c:plotVisOnly val="1"/>
     <c:dispBlanksAs val="span"/>
+    <c:showDLblsOverMax val="1"/>
   </c:chart>
   <c:spPr>
     <a:noFill/>
@@ -756,9 +727,11 @@
 </file>
 
 <file path=ppt/charts/chart3.xml><?xml version="1.0" encoding="utf-8"?>
-<c:chartSpace xmlns:c="http://schemas.openxmlformats.org/drawingml/2006/chart" xmlns:a="http://schemas.openxmlformats.org/drawingml/2006/main" xmlns:r="http://schemas.openxmlformats.org/officeDocument/2006/relationships">
+<c:chartSpace xmlns:c="http://schemas.openxmlformats.org/drawingml/2006/chart" xmlns:a="http://schemas.openxmlformats.org/drawingml/2006/main" xmlns:r="http://schemas.openxmlformats.org/officeDocument/2006/relationships" xmlns:c16r2="http://schemas.microsoft.com/office/drawing/2015/06/chart">
   <c:date1904 val="0"/>
+  <c:lang val="en-US"/>
   <c:roundedCorners val="1"/>
+  <c:style val="2"/>
   <c:chart>
     <c:title>
       <c:tx>
@@ -775,7 +748,7 @@
               </a:defRPr>
             </a:pPr>
             <a:r>
-              <a:rPr sz="1200" b="0" i="0" u="none" strike="noStrike">
+              <a:rPr lang="en-ZA" sz="1200" b="0" i="0" u="none" strike="noStrike">
                 <a:solidFill>
                   <a:srgbClr val="1B1F1D"/>
                 </a:solidFill>
@@ -786,7 +759,6 @@
           </a:p>
         </c:rich>
       </c:tx>
-      <c:layout/>
       <c:overlay val="0"/>
     </c:title>
     <c:autoTitleDeleted val="0"/>
@@ -818,19 +790,27 @@
           </c:spPr>
           <c:invertIfNegative val="0"/>
           <c:dLbls>
-            <c:numFmt formatCode="₦0&quot;M&quot;" sourceLinked="0"/>
+            <c:numFmt formatCode="\₦0&quot;M&quot;" sourceLinked="0"/>
+            <c:spPr>
+              <a:noFill/>
+              <a:ln>
+                <a:noFill/>
+              </a:ln>
+              <a:effectLst/>
+            </c:spPr>
             <c:txPr>
               <a:bodyPr/>
               <a:lstStyle/>
               <a:p>
                 <a:pPr>
-                  <a:defRPr b="0" i="0" strike="noStrike" sz="1000" u="none">
+                  <a:defRPr sz="1000" b="0" i="0" u="none" strike="noStrike">
                     <a:solidFill>
                       <a:srgbClr val="1B1F1D"/>
                     </a:solidFill>
                     <a:latin typeface="+mn-lt"/>
                   </a:defRPr>
                 </a:pPr>
+                <a:endParaRPr lang="en-US"/>
               </a:p>
             </c:txPr>
             <c:showLegendKey val="0"/>
@@ -840,31 +820,34 @@
             <c:showPercent val="0"/>
             <c:showBubbleSize val="0"/>
             <c:showLeaderLines val="0"/>
+            <c:extLst>
+              <c:ext xmlns:c15="http://schemas.microsoft.com/office/drawing/2012/chart" uri="{CE6537A1-D6FC-4f65-9D91-7224C49458BB}">
+                <c15:showLeaderLines val="0"/>
+              </c:ext>
+            </c:extLst>
           </c:dLbls>
           <c:cat>
-            <c:multiLvlStrRef>
+            <c:strRef>
               <c:f>Sheet1!$A$2:$A$6</c:f>
-              <c:multiLvlStrCache>
+              <c:strCache>
                 <c:ptCount val="5"/>
-                <c:lvl>
-                  <c:pt idx="0">
-                    <c:v>Beauty</c:v>
-                  </c:pt>
-                  <c:pt idx="1">
-                    <c:v>Groceries</c:v>
-                  </c:pt>
-                  <c:pt idx="2">
-                    <c:v>Electronics</c:v>
-                  </c:pt>
-                  <c:pt idx="3">
-                    <c:v>Fashion</c:v>
-                  </c:pt>
-                  <c:pt idx="4">
-                    <c:v>Home</c:v>
-                  </c:pt>
-                </c:lvl>
-              </c:multiLvlStrCache>
-            </c:multiLvlStrRef>
+                <c:pt idx="0">
+                  <c:v>Beauty</c:v>
+                </c:pt>
+                <c:pt idx="1">
+                  <c:v>Groceries</c:v>
+                </c:pt>
+                <c:pt idx="2">
+                  <c:v>Electronics</c:v>
+                </c:pt>
+                <c:pt idx="3">
+                  <c:v>Fashion</c:v>
+                </c:pt>
+                <c:pt idx="4">
+                  <c:v>Home</c:v>
+                </c:pt>
+              </c:strCache>
+            </c:strRef>
           </c:cat>
           <c:val>
             <c:numRef>
@@ -873,53 +856,40 @@
                 <c:formatCode>General</c:formatCode>
                 <c:ptCount val="5"/>
                 <c:pt idx="0">
-                  <c:v>523.1279601499999</c:v>
+                  <c:v>523.12796014999992</c:v>
                 </c:pt>
                 <c:pt idx="1">
-                  <c:v>463.29373505</c:v>
+                  <c:v>463.29373505000001</c:v>
                 </c:pt>
                 <c:pt idx="2">
-                  <c:v>458.60769455</c:v>
+                  <c:v>458.60769455000002</c:v>
                 </c:pt>
                 <c:pt idx="3">
                   <c:v>412.22461905</c:v>
                 </c:pt>
                 <c:pt idx="4">
-                  <c:v>389.5838217</c:v>
+                  <c:v>389.58382169999999</c:v>
                 </c:pt>
               </c:numCache>
             </c:numRef>
           </c:val>
+          <c:extLst>
+            <c:ext xmlns:c16="http://schemas.microsoft.com/office/drawing/2014/chart" uri="{C3380CC4-5D6E-409C-BE32-E72D297353CC}">
+              <c16:uniqueId val="{00000000-D04D-4D92-899C-D81D67FFBB2C}"/>
+            </c:ext>
+          </c:extLst>
         </c:ser>
         <c:dLbls>
-          <c:numFmt formatCode="₦0&quot;M&quot;" sourceLinked="0"/>
-          <c:txPr>
-            <a:bodyPr/>
-            <a:lstStyle/>
-            <a:p>
-              <a:pPr>
-                <a:defRPr b="0" i="0" strike="noStrike" sz="1000" u="none">
-                  <a:solidFill>
-                    <a:srgbClr val="1B1F1D"/>
-                  </a:solidFill>
-                  <a:latin typeface="+mn-lt"/>
-                </a:defRPr>
-              </a:pPr>
-            </a:p>
-          </c:txPr>
           <c:showLegendKey val="0"/>
           <c:showVal val="1"/>
           <c:showCatName val="0"/>
           <c:showSerName val="0"/>
           <c:showPercent val="0"/>
           <c:showBubbleSize val="0"/>
-          <c:showLeaderLines val="0"/>
         </c:dLbls>
         <c:gapWidth val="50"/>
-        <c:overlap val="0"/>
         <c:axId val="2094734554"/>
         <c:axId val="2094734552"/>
-        <c:axId val="2094734556"/>
       </c:barChart>
       <c:catAx>
         <c:axId val="2094734554"/>
@@ -958,6 +928,7 @@
         <c:crosses val="autoZero"/>
         <c:auto val="1"/>
         <c:lblAlgn val="ctr"/>
+        <c:lblOffset val="100"/>
         <c:noMultiLvlLbl val="1"/>
       </c:catAx>
       <c:valAx>
@@ -967,33 +938,11 @@
           <c:min val="0"/>
         </c:scaling>
         <c:delete val="1"/>
-        <c:axPos val="b"/>
+        <c:axPos val="t"/>
         <c:numFmt formatCode="General" sourceLinked="0"/>
         <c:majorTickMark val="out"/>
         <c:minorTickMark val="none"/>
         <c:tickLblPos val="low"/>
-        <c:spPr>
-          <a:ln w="12700" cap="flat">
-            <a:noFill/>
-            <a:prstDash val="solid"/>
-            <a:round/>
-          </a:ln>
-        </c:spPr>
-        <c:txPr>
-          <a:bodyPr/>
-          <a:lstStyle/>
-          <a:p>
-            <a:pPr>
-              <a:defRPr sz="1000" b="0" i="0" u="none" strike="noStrike">
-                <a:solidFill>
-                  <a:srgbClr val="52514E"/>
-                </a:solidFill>
-                <a:latin typeface="+mn-lt"/>
-              </a:defRPr>
-            </a:pPr>
-            <a:endParaRPr lang="en-US"/>
-          </a:p>
-        </c:txPr>
         <c:crossAx val="2094734554"/>
         <c:crosses val="autoZero"/>
         <c:crossBetween val="between"/>
@@ -1008,6 +957,7 @@
     </c:plotArea>
     <c:plotVisOnly val="1"/>
     <c:dispBlanksAs val="span"/>
+    <c:showDLblsOverMax val="1"/>
   </c:chart>
   <c:spPr>
     <a:noFill/>
@@ -1023,9 +973,11 @@
 </file>
 
 <file path=ppt/charts/chart4.xml><?xml version="1.0" encoding="utf-8"?>
-<c:chartSpace xmlns:c="http://schemas.openxmlformats.org/drawingml/2006/chart" xmlns:a="http://schemas.openxmlformats.org/drawingml/2006/main" xmlns:r="http://schemas.openxmlformats.org/officeDocument/2006/relationships">
+<c:chartSpace xmlns:c="http://schemas.openxmlformats.org/drawingml/2006/chart" xmlns:a="http://schemas.openxmlformats.org/drawingml/2006/main" xmlns:r="http://schemas.openxmlformats.org/officeDocument/2006/relationships" xmlns:c16r2="http://schemas.microsoft.com/office/drawing/2015/06/chart">
   <c:date1904 val="0"/>
+  <c:lang val="en-US"/>
   <c:roundedCorners val="1"/>
+  <c:style val="2"/>
   <c:chart>
     <c:title>
       <c:tx>
@@ -1042,7 +994,7 @@
               </a:defRPr>
             </a:pPr>
             <a:r>
-              <a:rPr sz="1200" b="0" i="0" u="none" strike="noStrike">
+              <a:rPr lang="en-US" sz="1200" b="0" i="0" u="none" strike="noStrike">
                 <a:solidFill>
                   <a:srgbClr val="1B1F1D"/>
                 </a:solidFill>
@@ -1053,7 +1005,6 @@
           </a:p>
         </c:rich>
       </c:tx>
-      <c:layout/>
       <c:overlay val="0"/>
     </c:title>
     <c:autoTitleDeleted val="0"/>
@@ -1085,19 +1036,27 @@
           </c:spPr>
           <c:invertIfNegative val="0"/>
           <c:dLbls>
-            <c:numFmt formatCode="₦0&quot;M&quot;" sourceLinked="0"/>
+            <c:numFmt formatCode="\₦0&quot;M&quot;" sourceLinked="0"/>
+            <c:spPr>
+              <a:noFill/>
+              <a:ln>
+                <a:noFill/>
+              </a:ln>
+              <a:effectLst/>
+            </c:spPr>
             <c:txPr>
               <a:bodyPr/>
               <a:lstStyle/>
               <a:p>
                 <a:pPr>
-                  <a:defRPr b="0" i="0" strike="noStrike" sz="1000" u="none">
+                  <a:defRPr sz="1000" b="0" i="0" u="none" strike="noStrike">
                     <a:solidFill>
                       <a:srgbClr val="1B1F1D"/>
                     </a:solidFill>
                     <a:latin typeface="+mn-lt"/>
                   </a:defRPr>
                 </a:pPr>
+                <a:endParaRPr lang="en-US"/>
               </a:p>
             </c:txPr>
             <c:showLegendKey val="0"/>
@@ -1107,31 +1066,34 @@
             <c:showPercent val="0"/>
             <c:showBubbleSize val="0"/>
             <c:showLeaderLines val="0"/>
+            <c:extLst>
+              <c:ext xmlns:c15="http://schemas.microsoft.com/office/drawing/2012/chart" uri="{CE6537A1-D6FC-4f65-9D91-7224C49458BB}">
+                <c15:showLeaderLines val="0"/>
+              </c:ext>
+            </c:extLst>
           </c:dLbls>
           <c:cat>
-            <c:multiLvlStrRef>
+            <c:strRef>
               <c:f>Sheet1!$A$2:$A$6</c:f>
-              <c:multiLvlStrCache>
+              <c:strCache>
                 <c:ptCount val="5"/>
-                <c:lvl>
-                  <c:pt idx="0">
-                    <c:v>South West</c:v>
-                  </c:pt>
-                  <c:pt idx="1">
-                    <c:v>South East</c:v>
-                  </c:pt>
-                  <c:pt idx="2">
-                    <c:v>North Central</c:v>
-                  </c:pt>
-                  <c:pt idx="3">
-                    <c:v>South South</c:v>
-                  </c:pt>
-                  <c:pt idx="4">
-                    <c:v>North West</c:v>
-                  </c:pt>
-                </c:lvl>
-              </c:multiLvlStrCache>
-            </c:multiLvlStrRef>
+                <c:pt idx="0">
+                  <c:v>South West</c:v>
+                </c:pt>
+                <c:pt idx="1">
+                  <c:v>South East</c:v>
+                </c:pt>
+                <c:pt idx="2">
+                  <c:v>North Central</c:v>
+                </c:pt>
+                <c:pt idx="3">
+                  <c:v>South South</c:v>
+                </c:pt>
+                <c:pt idx="4">
+                  <c:v>North West</c:v>
+                </c:pt>
+              </c:strCache>
+            </c:strRef>
           </c:cat>
           <c:val>
             <c:numRef>
@@ -1140,16 +1102,16 @@
                 <c:formatCode>General</c:formatCode>
                 <c:ptCount val="5"/>
                 <c:pt idx="0">
-                  <c:v>93.11589249500001</c:v>
+                  <c:v>93.115892495000011</c:v>
                 </c:pt>
                 <c:pt idx="1">
-                  <c:v>91.40355975</c:v>
+                  <c:v>91.403559749999999</c:v>
                 </c:pt>
                 <c:pt idx="2">
-                  <c:v>88.8104472875</c:v>
+                  <c:v>88.810447287499997</c:v>
                 </c:pt>
                 <c:pt idx="3">
-                  <c:v>86.61108127000001</c:v>
+                  <c:v>86.611081270000014</c:v>
                 </c:pt>
                 <c:pt idx="4">
                   <c:v>86.14364763750001</c:v>
@@ -1157,36 +1119,23 @@
               </c:numCache>
             </c:numRef>
           </c:val>
+          <c:extLst>
+            <c:ext xmlns:c16="http://schemas.microsoft.com/office/drawing/2014/chart" uri="{C3380CC4-5D6E-409C-BE32-E72D297353CC}">
+              <c16:uniqueId val="{00000000-6B01-4792-AA56-683609D4F907}"/>
+            </c:ext>
+          </c:extLst>
         </c:ser>
         <c:dLbls>
-          <c:numFmt formatCode="₦0&quot;M&quot;" sourceLinked="0"/>
-          <c:txPr>
-            <a:bodyPr/>
-            <a:lstStyle/>
-            <a:p>
-              <a:pPr>
-                <a:defRPr b="0" i="0" strike="noStrike" sz="1000" u="none">
-                  <a:solidFill>
-                    <a:srgbClr val="1B1F1D"/>
-                  </a:solidFill>
-                  <a:latin typeface="+mn-lt"/>
-                </a:defRPr>
-              </a:pPr>
-            </a:p>
-          </c:txPr>
           <c:showLegendKey val="0"/>
           <c:showVal val="1"/>
           <c:showCatName val="0"/>
           <c:showSerName val="0"/>
           <c:showPercent val="0"/>
           <c:showBubbleSize val="0"/>
-          <c:showLeaderLines val="0"/>
         </c:dLbls>
         <c:gapWidth val="50"/>
-        <c:overlap val="0"/>
         <c:axId val="2094734554"/>
         <c:axId val="2094734552"/>
-        <c:axId val="2094734556"/>
       </c:barChart>
       <c:catAx>
         <c:axId val="2094734554"/>
@@ -1225,6 +1174,7 @@
         <c:crosses val="autoZero"/>
         <c:auto val="1"/>
         <c:lblAlgn val="ctr"/>
+        <c:lblOffset val="100"/>
         <c:noMultiLvlLbl val="1"/>
       </c:catAx>
       <c:valAx>
@@ -1234,33 +1184,11 @@
           <c:min val="0"/>
         </c:scaling>
         <c:delete val="1"/>
-        <c:axPos val="b"/>
+        <c:axPos val="t"/>
         <c:numFmt formatCode="General" sourceLinked="0"/>
         <c:majorTickMark val="out"/>
         <c:minorTickMark val="none"/>
         <c:tickLblPos val="low"/>
-        <c:spPr>
-          <a:ln w="12700" cap="flat">
-            <a:noFill/>
-            <a:prstDash val="solid"/>
-            <a:round/>
-          </a:ln>
-        </c:spPr>
-        <c:txPr>
-          <a:bodyPr/>
-          <a:lstStyle/>
-          <a:p>
-            <a:pPr>
-              <a:defRPr sz="1000" b="0" i="0" u="none" strike="noStrike">
-                <a:solidFill>
-                  <a:srgbClr val="52514E"/>
-                </a:solidFill>
-                <a:latin typeface="+mn-lt"/>
-              </a:defRPr>
-            </a:pPr>
-            <a:endParaRPr lang="en-US"/>
-          </a:p>
-        </c:txPr>
         <c:crossAx val="2094734554"/>
         <c:crosses val="autoZero"/>
         <c:crossBetween val="between"/>
@@ -1275,6 +1203,7 @@
     </c:plotArea>
     <c:plotVisOnly val="1"/>
     <c:dispBlanksAs val="span"/>
+    <c:showDLblsOverMax val="1"/>
   </c:chart>
   <c:spPr>
     <a:noFill/>
@@ -1290,9 +1219,11 @@
 </file>
 
 <file path=ppt/charts/chart5.xml><?xml version="1.0" encoding="utf-8"?>
-<c:chartSpace xmlns:c="http://schemas.openxmlformats.org/drawingml/2006/chart" xmlns:a="http://schemas.openxmlformats.org/drawingml/2006/main" xmlns:r="http://schemas.openxmlformats.org/officeDocument/2006/relationships">
+<c:chartSpace xmlns:c="http://schemas.openxmlformats.org/drawingml/2006/chart" xmlns:a="http://schemas.openxmlformats.org/drawingml/2006/main" xmlns:r="http://schemas.openxmlformats.org/officeDocument/2006/relationships" xmlns:c16r2="http://schemas.microsoft.com/office/drawing/2015/06/chart">
   <c:date1904 val="0"/>
+  <c:lang val="en-US"/>
   <c:roundedCorners val="1"/>
+  <c:style val="2"/>
   <c:chart>
     <c:title>
       <c:tx>
@@ -1309,7 +1240,7 @@
               </a:defRPr>
             </a:pPr>
             <a:r>
-              <a:rPr sz="1200" b="0" i="0" u="none" strike="noStrike">
+              <a:rPr lang="en-US" sz="1200" b="0" i="0" u="none" strike="noStrike">
                 <a:solidFill>
                   <a:srgbClr val="1B1F1D"/>
                 </a:solidFill>
@@ -1320,7 +1251,6 @@
           </a:p>
         </c:rich>
       </c:tx>
-      <c:layout/>
       <c:overlay val="0"/>
     </c:title>
     <c:autoTitleDeleted val="0"/>
@@ -1353,18 +1283,26 @@
           <c:invertIfNegative val="0"/>
           <c:dLbls>
             <c:numFmt formatCode="0%" sourceLinked="0"/>
+            <c:spPr>
+              <a:noFill/>
+              <a:ln>
+                <a:noFill/>
+              </a:ln>
+              <a:effectLst/>
+            </c:spPr>
             <c:txPr>
               <a:bodyPr/>
               <a:lstStyle/>
               <a:p>
                 <a:pPr>
-                  <a:defRPr b="0" i="0" strike="noStrike" sz="1000" u="none">
+                  <a:defRPr sz="1000" b="0" i="0" u="none" strike="noStrike">
                     <a:solidFill>
                       <a:srgbClr val="1B1F1D"/>
                     </a:solidFill>
                     <a:latin typeface="+mn-lt"/>
                   </a:defRPr>
                 </a:pPr>
+                <a:endParaRPr lang="en-US"/>
               </a:p>
             </c:txPr>
             <c:showLegendKey val="0"/>
@@ -1374,28 +1312,31 @@
             <c:showPercent val="0"/>
             <c:showBubbleSize val="0"/>
             <c:showLeaderLines val="0"/>
+            <c:extLst>
+              <c:ext xmlns:c15="http://schemas.microsoft.com/office/drawing/2012/chart" uri="{CE6537A1-D6FC-4f65-9D91-7224C49458BB}">
+                <c15:showLeaderLines val="0"/>
+              </c:ext>
+            </c:extLst>
           </c:dLbls>
           <c:cat>
-            <c:multiLvlStrRef>
+            <c:strRef>
               <c:f>Sheet1!$A$2:$A$5</c:f>
-              <c:multiLvlStrCache>
+              <c:strCache>
                 <c:ptCount val="4"/>
-                <c:lvl>
-                  <c:pt idx="0">
-                    <c:v>Champions</c:v>
-                  </c:pt>
-                  <c:pt idx="1">
-                    <c:v>Active Low-Converters</c:v>
-                  </c:pt>
-                  <c:pt idx="2">
-                    <c:v>At Risk / Lapsing</c:v>
-                  </c:pt>
-                  <c:pt idx="3">
-                    <c:v>Non-Converters</c:v>
-                  </c:pt>
-                </c:lvl>
-              </c:multiLvlStrCache>
-            </c:multiLvlStrRef>
+                <c:pt idx="0">
+                  <c:v>Champions</c:v>
+                </c:pt>
+                <c:pt idx="1">
+                  <c:v>Active Low-Converters</c:v>
+                </c:pt>
+                <c:pt idx="2">
+                  <c:v>At Risk / Lapsing</c:v>
+                </c:pt>
+                <c:pt idx="3">
+                  <c:v>Non-Converters</c:v>
+                </c:pt>
+              </c:strCache>
+            </c:strRef>
           </c:cat>
           <c:val>
             <c:numRef>
@@ -1404,20 +1345,25 @@
                 <c:formatCode>General</c:formatCode>
                 <c:ptCount val="4"/>
                 <c:pt idx="0">
-                  <c:v>0.4342</c:v>
+                  <c:v>0.43419999999999997</c:v>
                 </c:pt>
                 <c:pt idx="1">
-                  <c:v>0.4034</c:v>
+                  <c:v>0.40339999999999998</c:v>
                 </c:pt>
                 <c:pt idx="2">
-                  <c:v>0.1214</c:v>
+                  <c:v>0.12139999999999999</c:v>
                 </c:pt>
                 <c:pt idx="3">
-                  <c:v>0.041</c:v>
+                  <c:v>4.1000000000000002E-2</c:v>
                 </c:pt>
               </c:numCache>
             </c:numRef>
           </c:val>
+          <c:extLst>
+            <c:ext xmlns:c16="http://schemas.microsoft.com/office/drawing/2014/chart" uri="{C3380CC4-5D6E-409C-BE32-E72D297353CC}">
+              <c16:uniqueId val="{00000000-63EA-4698-A670-C04E9922D3F9}"/>
+            </c:ext>
+          </c:extLst>
         </c:ser>
         <c:ser>
           <c:idx val="1"/>
@@ -1442,18 +1388,26 @@
           <c:invertIfNegative val="0"/>
           <c:dLbls>
             <c:numFmt formatCode="0%" sourceLinked="0"/>
+            <c:spPr>
+              <a:noFill/>
+              <a:ln>
+                <a:noFill/>
+              </a:ln>
+              <a:effectLst/>
+            </c:spPr>
             <c:txPr>
               <a:bodyPr/>
               <a:lstStyle/>
               <a:p>
                 <a:pPr>
-                  <a:defRPr b="0" i="0" strike="noStrike" sz="1000" u="none">
+                  <a:defRPr sz="1000" b="0" i="0" u="none" strike="noStrike">
                     <a:solidFill>
                       <a:srgbClr val="1B1F1D"/>
                     </a:solidFill>
                     <a:latin typeface="+mn-lt"/>
                   </a:defRPr>
                 </a:pPr>
+                <a:endParaRPr lang="en-US"/>
               </a:p>
             </c:txPr>
             <c:showLegendKey val="0"/>
@@ -1463,28 +1417,31 @@
             <c:showPercent val="0"/>
             <c:showBubbleSize val="0"/>
             <c:showLeaderLines val="0"/>
+            <c:extLst>
+              <c:ext xmlns:c15="http://schemas.microsoft.com/office/drawing/2012/chart" uri="{CE6537A1-D6FC-4f65-9D91-7224C49458BB}">
+                <c15:showLeaderLines val="0"/>
+              </c:ext>
+            </c:extLst>
           </c:dLbls>
           <c:cat>
-            <c:multiLvlStrRef>
+            <c:strRef>
               <c:f>Sheet1!$A$2:$A$5</c:f>
-              <c:multiLvlStrCache>
+              <c:strCache>
                 <c:ptCount val="4"/>
-                <c:lvl>
-                  <c:pt idx="0">
-                    <c:v>Champions</c:v>
-                  </c:pt>
-                  <c:pt idx="1">
-                    <c:v>Active Low-Converters</c:v>
-                  </c:pt>
-                  <c:pt idx="2">
-                    <c:v>At Risk / Lapsing</c:v>
-                  </c:pt>
-                  <c:pt idx="3">
-                    <c:v>Non-Converters</c:v>
-                  </c:pt>
-                </c:lvl>
-              </c:multiLvlStrCache>
-            </c:multiLvlStrRef>
+                <c:pt idx="0">
+                  <c:v>Champions</c:v>
+                </c:pt>
+                <c:pt idx="1">
+                  <c:v>Active Low-Converters</c:v>
+                </c:pt>
+                <c:pt idx="2">
+                  <c:v>At Risk / Lapsing</c:v>
+                </c:pt>
+                <c:pt idx="3">
+                  <c:v>Non-Converters</c:v>
+                </c:pt>
+              </c:strCache>
+            </c:strRef>
           </c:cat>
           <c:val>
             <c:numRef>
@@ -1493,10 +1450,10 @@
                 <c:formatCode>General</c:formatCode>
                 <c:ptCount val="4"/>
                 <c:pt idx="0">
-                  <c:v>0.637909740900635</c:v>
+                  <c:v>0.63790974090063501</c:v>
                 </c:pt>
                 <c:pt idx="1">
-                  <c:v>0.2598287111669674</c:v>
+                  <c:v>0.25982871116696737</c:v>
                 </c:pt>
                 <c:pt idx="2">
                   <c:v>0.10226154793239761</c:v>
@@ -1507,36 +1464,23 @@
               </c:numCache>
             </c:numRef>
           </c:val>
+          <c:extLst>
+            <c:ext xmlns:c16="http://schemas.microsoft.com/office/drawing/2014/chart" uri="{C3380CC4-5D6E-409C-BE32-E72D297353CC}">
+              <c16:uniqueId val="{00000001-63EA-4698-A670-C04E9922D3F9}"/>
+            </c:ext>
+          </c:extLst>
         </c:ser>
         <c:dLbls>
-          <c:numFmt formatCode="0%" sourceLinked="0"/>
-          <c:txPr>
-            <a:bodyPr/>
-            <a:lstStyle/>
-            <a:p>
-              <a:pPr>
-                <a:defRPr b="0" i="0" strike="noStrike" sz="1000" u="none">
-                  <a:solidFill>
-                    <a:srgbClr val="1B1F1D"/>
-                  </a:solidFill>
-                  <a:latin typeface="+mn-lt"/>
-                </a:defRPr>
-              </a:pPr>
-            </a:p>
-          </c:txPr>
           <c:showLegendKey val="0"/>
           <c:showVal val="1"/>
           <c:showCatName val="0"/>
           <c:showSerName val="0"/>
           <c:showPercent val="0"/>
           <c:showBubbleSize val="0"/>
-          <c:showLeaderLines val="0"/>
         </c:dLbls>
         <c:gapWidth val="40"/>
-        <c:overlap val="0"/>
         <c:axId val="2094734554"/>
         <c:axId val="2094734552"/>
-        <c:axId val="2094734556"/>
       </c:barChart>
       <c:catAx>
         <c:axId val="2094734554"/>
@@ -1575,6 +1519,7 @@
         <c:crosses val="autoZero"/>
         <c:auto val="1"/>
         <c:lblAlgn val="ctr"/>
+        <c:lblOffset val="100"/>
         <c:noMultiLvlLbl val="1"/>
       </c:catAx>
       <c:valAx>
@@ -1584,33 +1529,11 @@
           <c:min val="0"/>
         </c:scaling>
         <c:delete val="1"/>
-        <c:axPos val="b"/>
+        <c:axPos val="t"/>
         <c:numFmt formatCode="General" sourceLinked="0"/>
         <c:majorTickMark val="out"/>
         <c:minorTickMark val="none"/>
         <c:tickLblPos val="low"/>
-        <c:spPr>
-          <a:ln w="12700" cap="flat">
-            <a:noFill/>
-            <a:prstDash val="solid"/>
-            <a:round/>
-          </a:ln>
-        </c:spPr>
-        <c:txPr>
-          <a:bodyPr/>
-          <a:lstStyle/>
-          <a:p>
-            <a:pPr>
-              <a:defRPr sz="1000" b="0" i="0" u="none" strike="noStrike">
-                <a:solidFill>
-                  <a:srgbClr val="52514E"/>
-                </a:solidFill>
-                <a:latin typeface="+mn-lt"/>
-              </a:defRPr>
-            </a:pPr>
-            <a:endParaRPr lang="en-US"/>
-          </a:p>
-        </c:txPr>
         <c:crossAx val="2094734554"/>
         <c:crosses val="autoZero"/>
         <c:crossBetween val="between"/>
@@ -1642,6 +1565,7 @@
     </c:legend>
     <c:plotVisOnly val="1"/>
     <c:dispBlanksAs val="span"/>
+    <c:showDLblsOverMax val="1"/>
   </c:chart>
   <c:spPr>
     <a:noFill/>
@@ -1657,9 +1581,11 @@
 </file>
 
 <file path=ppt/charts/chart6.xml><?xml version="1.0" encoding="utf-8"?>
-<c:chartSpace xmlns:c="http://schemas.openxmlformats.org/drawingml/2006/chart" xmlns:a="http://schemas.openxmlformats.org/drawingml/2006/main" xmlns:r="http://schemas.openxmlformats.org/officeDocument/2006/relationships">
+<c:chartSpace xmlns:c="http://schemas.openxmlformats.org/drawingml/2006/chart" xmlns:a="http://schemas.openxmlformats.org/drawingml/2006/main" xmlns:r="http://schemas.openxmlformats.org/officeDocument/2006/relationships" xmlns:c16r2="http://schemas.microsoft.com/office/drawing/2015/06/chart">
   <c:date1904 val="0"/>
+  <c:lang val="en-US"/>
   <c:roundedCorners val="1"/>
+  <c:style val="2"/>
   <c:chart>
     <c:title>
       <c:tx>
@@ -1676,7 +1602,7 @@
               </a:defRPr>
             </a:pPr>
             <a:r>
-              <a:rPr sz="1200" b="0" i="0" u="none" strike="noStrike">
+              <a:rPr lang="en-US" sz="1200" b="0" i="0" u="none" strike="noStrike">
                 <a:solidFill>
                   <a:srgbClr val="1B1F1D"/>
                 </a:solidFill>
@@ -1687,7 +1613,6 @@
           </a:p>
         </c:rich>
       </c:tx>
-      <c:layout/>
       <c:overlay val="0"/>
     </c:title>
     <c:autoTitleDeleted val="0"/>
@@ -1720,18 +1645,26 @@
           <c:invertIfNegative val="0"/>
           <c:dLbls>
             <c:numFmt formatCode="#,##0" sourceLinked="0"/>
+            <c:spPr>
+              <a:noFill/>
+              <a:ln>
+                <a:noFill/>
+              </a:ln>
+              <a:effectLst/>
+            </c:spPr>
             <c:txPr>
               <a:bodyPr/>
               <a:lstStyle/>
               <a:p>
                 <a:pPr>
-                  <a:defRPr b="0" i="0" strike="noStrike" sz="1000" u="none">
+                  <a:defRPr sz="1000" b="0" i="0" u="none" strike="noStrike">
                     <a:solidFill>
                       <a:srgbClr val="1B1F1D"/>
                     </a:solidFill>
                     <a:latin typeface="+mn-lt"/>
                   </a:defRPr>
                 </a:pPr>
+                <a:endParaRPr lang="en-US"/>
               </a:p>
             </c:txPr>
             <c:showLegendKey val="0"/>
@@ -1741,25 +1674,28 @@
             <c:showPercent val="0"/>
             <c:showBubbleSize val="0"/>
             <c:showLeaderLines val="0"/>
+            <c:extLst>
+              <c:ext xmlns:c15="http://schemas.microsoft.com/office/drawing/2012/chart" uri="{CE6537A1-D6FC-4f65-9D91-7224C49458BB}">
+                <c15:showLeaderLines val="0"/>
+              </c:ext>
+            </c:extLst>
           </c:dLbls>
           <c:cat>
-            <c:multiLvlStrRef>
+            <c:strRef>
               <c:f>Sheet1!$A$2:$A$4</c:f>
-              <c:multiLvlStrCache>
+              <c:strCache>
                 <c:ptCount val="3"/>
-                <c:lvl>
-                  <c:pt idx="0">
-                    <c:v>Low</c:v>
-                  </c:pt>
-                  <c:pt idx="1">
-                    <c:v>Medium</c:v>
-                  </c:pt>
-                  <c:pt idx="2">
-                    <c:v>High</c:v>
-                  </c:pt>
-                </c:lvl>
-              </c:multiLvlStrCache>
-            </c:multiLvlStrRef>
+                <c:pt idx="0">
+                  <c:v>Low</c:v>
+                </c:pt>
+                <c:pt idx="1">
+                  <c:v>Medium</c:v>
+                </c:pt>
+                <c:pt idx="2">
+                  <c:v>High</c:v>
+                </c:pt>
+              </c:strCache>
+            </c:strRef>
           </c:cat>
           <c:val>
             <c:numRef>
@@ -1779,36 +1715,23 @@
               </c:numCache>
             </c:numRef>
           </c:val>
+          <c:extLst>
+            <c:ext xmlns:c16="http://schemas.microsoft.com/office/drawing/2014/chart" uri="{C3380CC4-5D6E-409C-BE32-E72D297353CC}">
+              <c16:uniqueId val="{00000000-9269-46F8-9ED5-1B857C018F06}"/>
+            </c:ext>
+          </c:extLst>
         </c:ser>
         <c:dLbls>
-          <c:numFmt formatCode="#,##0" sourceLinked="0"/>
-          <c:txPr>
-            <a:bodyPr/>
-            <a:lstStyle/>
-            <a:p>
-              <a:pPr>
-                <a:defRPr b="0" i="0" strike="noStrike" sz="1000" u="none">
-                  <a:solidFill>
-                    <a:srgbClr val="1B1F1D"/>
-                  </a:solidFill>
-                  <a:latin typeface="+mn-lt"/>
-                </a:defRPr>
-              </a:pPr>
-            </a:p>
-          </c:txPr>
           <c:showLegendKey val="0"/>
           <c:showVal val="1"/>
           <c:showCatName val="0"/>
           <c:showSerName val="0"/>
           <c:showPercent val="0"/>
           <c:showBubbleSize val="0"/>
-          <c:showLeaderLines val="0"/>
         </c:dLbls>
         <c:gapWidth val="60"/>
-        <c:overlap val="0"/>
         <c:axId val="2094734554"/>
         <c:axId val="2094734552"/>
-        <c:axId val="2094734556"/>
       </c:barChart>
       <c:catAx>
         <c:axId val="2094734554"/>
@@ -1847,6 +1770,7 @@
         <c:crosses val="autoZero"/>
         <c:auto val="1"/>
         <c:lblAlgn val="ctr"/>
+        <c:lblOffset val="100"/>
         <c:noMultiLvlLbl val="1"/>
       </c:catAx>
       <c:valAx>
@@ -1860,28 +1784,6 @@
         <c:majorTickMark val="out"/>
         <c:minorTickMark val="none"/>
         <c:tickLblPos val="nextTo"/>
-        <c:spPr>
-          <a:ln w="12700" cap="flat">
-            <a:noFill/>
-            <a:prstDash val="solid"/>
-            <a:round/>
-          </a:ln>
-        </c:spPr>
-        <c:txPr>
-          <a:bodyPr/>
-          <a:lstStyle/>
-          <a:p>
-            <a:pPr>
-              <a:defRPr sz="1000" b="0" i="0" u="none" strike="noStrike">
-                <a:solidFill>
-                  <a:srgbClr val="52514E"/>
-                </a:solidFill>
-                <a:latin typeface="+mn-lt"/>
-              </a:defRPr>
-            </a:pPr>
-            <a:endParaRPr lang="en-US"/>
-          </a:p>
-        </c:txPr>
         <c:crossAx val="2094734554"/>
         <c:crosses val="autoZero"/>
         <c:crossBetween val="between"/>
@@ -1896,6 +1798,7 @@
     </c:plotArea>
     <c:plotVisOnly val="1"/>
     <c:dispBlanksAs val="span"/>
+    <c:showDLblsOverMax val="1"/>
   </c:chart>
   <c:spPr>
     <a:noFill/>
@@ -1932,234 +1835,10 @@
           <a:chExt cx="0" cy="0"/>
         </a:xfrm>
       </p:grpSpPr>
-      <p:sp>
-        <p:nvSpPr>
-          <p:cNvPr id="2" name="Header Placeholder 1"/>
-          <p:cNvSpPr>
-            <a:spLocks noGrp="1"/>
-          </p:cNvSpPr>
-          <p:nvPr>
-            <p:ph type="hdr" sz="quarter"/>
-          </p:nvPr>
-        </p:nvSpPr>
-        <p:spPr>
-          <a:xfrm>
-            <a:off x="0" y="0"/>
-            <a:ext cx="2971800" cy="458788"/>
-          </a:xfrm>
-          <a:prstGeom prst="rect">
-            <a:avLst/>
-          </a:prstGeom>
-        </p:spPr>
-        <p:txBody>
-          <a:bodyPr vert="horz" lIns="91440" tIns="45720" rIns="91440" bIns="45720" rtlCol="0"/>
-          <a:lstStyle>
-            <a:lvl1pPr algn="l">
-              <a:defRPr sz="1200"/>
-            </a:lvl1pPr>
-          </a:lstStyle>
-          <a:p>
-            <a:endParaRPr lang="en-US"/>
-          </a:p>
-        </p:txBody>
-      </p:sp>
-      <p:sp>
-        <p:nvSpPr>
-          <p:cNvPr id="3" name="Date Placeholder 2"/>
-          <p:cNvSpPr>
-            <a:spLocks noGrp="1"/>
-          </p:cNvSpPr>
-          <p:nvPr>
-            <p:ph type="dt" idx="1"/>
-          </p:nvPr>
-        </p:nvSpPr>
-        <p:spPr>
-          <a:xfrm>
-            <a:off x="3884613" y="0"/>
-            <a:ext cx="2971800" cy="458788"/>
-          </a:xfrm>
-          <a:prstGeom prst="rect">
-            <a:avLst/>
-          </a:prstGeom>
-        </p:spPr>
-        <p:txBody>
-          <a:bodyPr vert="horz" lIns="91440" tIns="45720" rIns="91440" bIns="45720" rtlCol="0"/>
-          <a:lstStyle>
-            <a:lvl1pPr algn="r">
-              <a:defRPr sz="1200"/>
-            </a:lvl1pPr>
-          </a:lstStyle>
-          <a:p>
-            <a:fld id="{5282F153-3F37-0F45-9E97-73ACFA13230C}" type="datetimeFigureOut">
-              <a:rPr lang="en-US"/>
-              <a:t>7/23/19</a:t>
-            </a:fld>
-            <a:endParaRPr lang="en-US"/>
-          </a:p>
-        </p:txBody>
-      </p:sp>
-      <p:sp>
-        <p:nvSpPr>
-          <p:cNvPr id="4" name="Slide Image Placeholder 3"/>
-          <p:cNvSpPr>
-            <a:spLocks noGrp="1" noRot="1" noChangeAspect="1"/>
-          </p:cNvSpPr>
-          <p:nvPr>
-            <p:ph type="sldImg" idx="2"/>
-          </p:nvPr>
-        </p:nvSpPr>
-        <p:spPr>
-          <a:xfrm>
-            <a:off x="685800" y="1143000"/>
-            <a:ext cx="5486400" cy="3086100"/>
-          </a:xfrm>
-          <a:prstGeom prst="rect">
-            <a:avLst/>
-          </a:prstGeom>
-          <a:noFill/>
-          <a:ln w="12700">
-            <a:solidFill>
-              <a:prstClr val="black"/>
-            </a:solidFill>
-          </a:ln>
-        </p:spPr>
-        <p:txBody>
-          <a:bodyPr vert="horz" lIns="91440" tIns="45720" rIns="91440" bIns="45720" rtlCol="0" anchor="ctr"/>
-          <a:lstStyle/>
-          <a:p>
-            <a:endParaRPr lang="en-US"/>
-          </a:p>
-        </p:txBody>
-      </p:sp>
-      <p:sp>
-        <p:nvSpPr>
-          <p:cNvPr id="5" name="Notes Placeholder 4"/>
-          <p:cNvSpPr>
-            <a:spLocks noGrp="1"/>
-          </p:cNvSpPr>
-          <p:nvPr>
-            <p:ph type="body" sz="quarter" idx="3"/>
-          </p:nvPr>
-        </p:nvSpPr>
-        <p:spPr>
-          <a:xfrm>
-            <a:off x="685800" y="4400550"/>
-            <a:ext cx="5486400" cy="3600450"/>
-          </a:xfrm>
-          <a:prstGeom prst="rect">
-            <a:avLst/>
-          </a:prstGeom>
-        </p:spPr>
-        <p:txBody>
-          <a:bodyPr vert="horz" lIns="91440" tIns="45720" rIns="91440" bIns="45720" rtlCol="0"/>
-          <a:lstStyle/>
-          <a:p>
-            <a:pPr lvl="0"/>
-            <a:r>
-              <a:rPr lang="en-US"/>
-              <a:t>Click to edit Master text styles</a:t>
-            </a:r>
-          </a:p>
-          <a:p>
-            <a:pPr lvl="1"/>
-            <a:r>
-              <a:rPr lang="en-US"/>
-              <a:t>Second level</a:t>
-            </a:r>
-          </a:p>
-          <a:p>
-            <a:pPr lvl="2"/>
-            <a:r>
-              <a:rPr lang="en-US"/>
-              <a:t>Third level</a:t>
-            </a:r>
-          </a:p>
-          <a:p>
-            <a:pPr lvl="3"/>
-            <a:r>
-              <a:rPr lang="en-US"/>
-              <a:t>Fourth level</a:t>
-            </a:r>
-          </a:p>
-          <a:p>
-            <a:pPr lvl="4"/>
-            <a:r>
-              <a:rPr lang="en-US"/>
-              <a:t>Fifth level</a:t>
-            </a:r>
-          </a:p>
-        </p:txBody>
-      </p:sp>
-      <p:sp>
-        <p:nvSpPr>
-          <p:cNvPr id="6" name="Footer Placeholder 5"/>
-          <p:cNvSpPr>
-            <a:spLocks noGrp="1"/>
-          </p:cNvSpPr>
-          <p:nvPr>
-            <p:ph type="ftr" sz="quarter" idx="4"/>
-          </p:nvPr>
-        </p:nvSpPr>
-        <p:spPr>
-          <a:xfrm>
-            <a:off x="0" y="8685213"/>
-            <a:ext cx="2971800" cy="458787"/>
-          </a:xfrm>
-          <a:prstGeom prst="rect">
-            <a:avLst/>
-          </a:prstGeom>
-        </p:spPr>
-        <p:txBody>
-          <a:bodyPr vert="horz" lIns="91440" tIns="45720" rIns="91440" bIns="45720" rtlCol="0" anchor="b"/>
-          <a:lstStyle>
-            <a:lvl1pPr algn="l">
-              <a:defRPr sz="1200"/>
-            </a:lvl1pPr>
-          </a:lstStyle>
-          <a:p>
-            <a:endParaRPr lang="en-US"/>
-          </a:p>
-        </p:txBody>
-      </p:sp>
-      <p:sp>
-        <p:nvSpPr>
-          <p:cNvPr id="7" name="Slide Number Placeholder 6"/>
-          <p:cNvSpPr>
-            <a:spLocks noGrp="1"/>
-          </p:cNvSpPr>
-          <p:nvPr>
-            <p:ph type="sldNum" sz="quarter" idx="5"/>
-          </p:nvPr>
-        </p:nvSpPr>
-        <p:spPr>
-          <a:xfrm>
-            <a:off x="3884613" y="8685213"/>
-            <a:ext cx="2971800" cy="458787"/>
-          </a:xfrm>
-          <a:prstGeom prst="rect">
-            <a:avLst/>
-          </a:prstGeom>
-        </p:spPr>
-        <p:txBody>
-          <a:bodyPr vert="horz" lIns="91440" tIns="45720" rIns="91440" bIns="45720" rtlCol="0" anchor="b"/>
-          <a:lstStyle>
-            <a:lvl1pPr algn="r">
-              <a:defRPr sz="1200"/>
-            </a:lvl1pPr>
-          </a:lstStyle>
-          <a:p>
-            <a:fld id="{CE5E9CC1-C706-0F49-92D6-E571CC5EEA8F}" type="slidenum">
-              <a:rPr lang="en-US"/>
-              <a:t>‹#›</a:t>
-            </a:fld>
-            <a:endParaRPr lang="en-US"/>
-          </a:p>
-        </p:txBody>
-      </p:sp>
     </p:spTree>
     <p:extLst>
       <p:ext uri="{BB962C8B-B14F-4D97-AF65-F5344CB8AC3E}">
-        <p14:creationId xmlns:p14="http://schemas.microsoft.com/office/powerpoint/2010/main" val="1024086991"/>
+        <p14:creationId xmlns:p14="http://schemas.microsoft.com/office/powerpoint/2010/main" val="2969102480"/>
       </p:ext>
     </p:extLst>
   </p:cSld>
@@ -2307,7 +1986,6 @@
               <a:rPr lang="en-US" dirty="0"/>
               <a:t>Welcome. This deck summarises the exploratory analysis of ShopSmart's 2025 retail data: nine tables, 50,000 orders, 5,000 customers and 25 stores. The goal is to understand the data before any machine learning is built.</a:t>
             </a:r>
-            <a:endParaRPr lang="en-US" dirty="0"/>
           </a:p>
         </p:txBody>
       </p:sp>
@@ -2395,7 +2073,6 @@
               <a:rPr lang="en-US" dirty="0"/>
               <a:t>The gross margin is 45%, but 27% of completed order lines sold below cost, losing 226 million naira. 57 products and 56 suppliers lost money overall. On inventory, 417 of 500 items hold more than three times their reorder level, and only 21 need restocking.</a:t>
             </a:r>
-            <a:endParaRPr lang="en-US" dirty="0"/>
           </a:p>
         </p:txBody>
       </p:sp>
@@ -2483,7 +2160,6 @@
               <a:rPr lang="en-US" dirty="0"/>
               <a:t>Correlation analysis shows order value is driven by price and quantity, customer value by frequency, and that returns don't correlate with any current variable. Pricing anomaly detection and churn/CLV models can start now. Completion and return prediction need new data first.</a:t>
             </a:r>
-            <a:endParaRPr lang="en-US" dirty="0"/>
           </a:p>
         </p:txBody>
       </p:sp>
@@ -2571,7 +2247,6 @@
               <a:rPr lang="en-US" dirty="0"/>
               <a:t>In priority order: fix order completion, stop below-cost sales, rebuild loyalty around RFM segments, rebalance stock, and invest in Beauty and Fashion before Q4, while fixing the source-system data issues.</a:t>
             </a:r>
-            <a:endParaRPr lang="en-US" dirty="0"/>
           </a:p>
         </p:txBody>
       </p:sp>
@@ -2659,7 +2334,6 @@
               <a:rPr lang="en-US" dirty="0"/>
               <a:t>To close: the first priority is data quality at source (discounts, regions, returns dates, supplier keys). Then the cleaned and engineered datasets feed the ML track. Questions welcome.</a:t>
             </a:r>
-            <a:endParaRPr lang="en-US" dirty="0"/>
           </a:p>
         </p:txBody>
       </p:sp>
@@ -2747,7 +2421,6 @@
               <a:rPr lang="en-US" dirty="0"/>
               <a:t>The headline: revenue is 2.25 billion naira from completed orders, but only one in three orders completes. Profit leaks through below-cost sales, and a lot of cash sits in stock. Everything else, such as stores, categories and segments, is remarkably even.</a:t>
             </a:r>
-            <a:endParaRPr lang="en-US" dirty="0"/>
           </a:p>
         </p:txBody>
       </p:sp>
@@ -2835,7 +2508,6 @@
               <a:rPr lang="en-US" dirty="0"/>
               <a:t>No missing values and no duplicate rows, but several business rules were broken. Each issue was fixed or flagged and logged in cleaning_log.csv. The most important: discount was a percentage but the system subtracted it as naira.</a:t>
             </a:r>
-            <a:endParaRPr lang="en-US" dirty="0"/>
           </a:p>
         </p:txBody>
       </p:sp>
@@ -2923,7 +2595,6 @@
               <a:rPr lang="en-US" dirty="0"/>
               <a:t>The ten KPIs from the brief. Revenue counts completed orders only. Note that inventory at cost is worth more than a full year of revenue.</a:t>
             </a:r>
-            <a:endParaRPr lang="en-US" dirty="0"/>
           </a:p>
         </p:txBody>
       </p:sp>
@@ -3011,7 +2682,6 @@
               <a:rPr lang="en-US" dirty="0"/>
               <a:t>Orders split almost exactly into thirds by status. Cancelled and pending orders are worth twice the revenue we actually earned. Raising completion from 33% to 40% would add about 470 million naira a year.</a:t>
             </a:r>
-            <a:endParaRPr lang="en-US" dirty="0"/>
           </a:p>
         </p:txBody>
       </p:sp>
@@ -3099,7 +2769,6 @@
               <a:rPr lang="en-US" dirty="0"/>
               <a:t>Monthly revenue moves within about 7% of its average. December is the peak at 201 million naira, then October. February looks weakest, but per trading day it is average, because it only has 28 days.</a:t>
             </a:r>
-            <a:endParaRPr lang="en-US" dirty="0"/>
           </a:p>
         </p:txBody>
       </p:sp>
@@ -3187,7 +2856,6 @@
               <a:rPr lang="en-US" dirty="0"/>
               <a:t>Beauty earns the most, but only because it has the most products. Revenue per product is about the same in every category. Growth from Q1 to Q4 favours Fashion and Beauty, while Groceries is flat.</a:t>
             </a:r>
-            <a:endParaRPr lang="en-US" dirty="0"/>
           </a:p>
         </p:txBody>
       </p:sp>
@@ -3275,7 +2943,6 @@
               <a:rPr lang="en-US" dirty="0"/>
               <a:t>Every store receives about 2,000 orders. The best store, Lagos STR003, completes 36% of them, and the weakest, Kano STR002, completes 32%. Per store, the South West zone leads and the North West trails, about an 8% gap. Zones use the corrected geopolitical mapping, because the source region field is unreliable.</a:t>
             </a:r>
-            <a:endParaRPr lang="en-US" dirty="0"/>
           </a:p>
         </p:txBody>
       </p:sp>
@@ -3363,7 +3030,6 @@
               <a:rPr lang="en-US" dirty="0"/>
               <a:t>Gold, Silver and Bronze members spend the same per customer, within 0.4%. A K-Means segmentation on recency, frequency, spend and completion finds real differences: Champions are 43% of customers but 64% of revenue. Every segment has the same mix of membership tiers.</a:t>
             </a:r>
-            <a:endParaRPr lang="en-US" dirty="0"/>
           </a:p>
         </p:txBody>
       </p:sp>
@@ -3441,6 +3107,7 @@
         <a:solidFill>
           <a:schemeClr val="tx2"/>
         </a:solidFill>
+        <a:effectLst/>
       </p:bgPr>
     </p:bg>
     <p:spTree>
@@ -3460,9 +3127,11 @@
       <p:sp>
         <p:nvSpPr>
           <p:cNvPr id="2" name="Text 0"/>
-          <p:cNvSpPr/>
+          <p:cNvSpPr>
+            <a:spLocks noGrp="1"/>
+          </p:cNvSpPr>
           <p:nvPr>
-            <p:ph idx="100" type="title" hasCustomPrompt="1"/>
+            <p:ph type="title" idx="100" hasCustomPrompt="1"/>
           </p:nvPr>
         </p:nvSpPr>
         <p:spPr>
@@ -3479,7 +3148,7 @@
         <p:txBody>
           <a:bodyPr wrap="square" rtlCol="0"/>
           <a:lstStyle>
-            <a:lvl1pPr algn="l" indent="0" marL="0">
+            <a:lvl1pPr marL="0" indent="0" algn="l">
               <a:buNone/>
               <a:defRPr lang="en-US" sz="3800" b="1" dirty="0">
                 <a:solidFill>
@@ -3492,7 +3161,7 @@
             </a:lvl1pPr>
           </a:lstStyle>
           <a:p>
-            <a:pPr algn="l" indent="0" marL="0">
+            <a:pPr marL="0" indent="0" algn="l">
               <a:buNone/>
             </a:pPr>
             <a:endParaRPr lang="en-US" sz="3800" dirty="0"/>
@@ -3502,9 +3171,11 @@
       <p:sp>
         <p:nvSpPr>
           <p:cNvPr id="3" name="Text 0"/>
-          <p:cNvSpPr/>
+          <p:cNvSpPr>
+            <a:spLocks noGrp="1"/>
+          </p:cNvSpPr>
           <p:nvPr>
-            <p:ph idx="101" type="body" hasCustomPrompt="1"/>
+            <p:ph type="body" idx="101" hasCustomPrompt="1"/>
           </p:nvPr>
         </p:nvSpPr>
         <p:spPr>
@@ -3521,7 +3192,7 @@
         <p:txBody>
           <a:bodyPr wrap="square" rtlCol="0"/>
           <a:lstStyle>
-            <a:lvl1pPr indent="0" marL="0">
+            <a:lvl1pPr marL="0" indent="0">
               <a:buNone/>
               <a:defRPr lang="en-US" sz="1600" dirty="0">
                 <a:solidFill>
@@ -3534,7 +3205,7 @@
             </a:lvl1pPr>
           </a:lstStyle>
           <a:p>
-            <a:pPr indent="0" marL="0">
+            <a:pPr marL="0" indent="0">
               <a:buNone/>
             </a:pPr>
             <a:endParaRPr lang="en-US" sz="1600" dirty="0"/>
@@ -3557,6 +3228,7 @@
         <a:solidFill>
           <a:schemeClr val="bg1"/>
         </a:solidFill>
+        <a:effectLst/>
       </p:bgPr>
     </p:bg>
     <p:spTree>
@@ -3576,9 +3248,11 @@
       <p:sp>
         <p:nvSpPr>
           <p:cNvPr id="2" name="Text 0"/>
-          <p:cNvSpPr/>
+          <p:cNvSpPr>
+            <a:spLocks noGrp="1"/>
+          </p:cNvSpPr>
           <p:nvPr>
-            <p:ph idx="100" type="title" hasCustomPrompt="1"/>
+            <p:ph type="title" idx="100" hasCustomPrompt="1"/>
           </p:nvPr>
         </p:nvSpPr>
         <p:spPr>
@@ -3595,7 +3269,7 @@
         <p:txBody>
           <a:bodyPr wrap="square" rtlCol="0"/>
           <a:lstStyle>
-            <a:lvl1pPr algn="l" indent="0" marL="0">
+            <a:lvl1pPr marL="0" indent="0" algn="l">
               <a:buNone/>
               <a:defRPr lang="en-US" sz="2600" b="1" dirty="0">
                 <a:solidFill>
@@ -3608,7 +3282,7 @@
             </a:lvl1pPr>
           </a:lstStyle>
           <a:p>
-            <a:pPr algn="l" indent="0" marL="0">
+            <a:pPr marL="0" indent="0" algn="l">
               <a:buNone/>
             </a:pPr>
             <a:endParaRPr lang="en-US" sz="2600" dirty="0"/>
@@ -3636,7 +3310,7 @@
           <a:bodyPr wrap="square" lIns="0" tIns="0" rIns="0" bIns="0" rtlCol="0" anchor="ctr"/>
           <a:lstStyle/>
           <a:p>
-            <a:pPr indent="0" marL="0">
+            <a:pPr marL="0" indent="0">
               <a:buNone/>
             </a:pPr>
             <a:r>
@@ -3674,7 +3348,7 @@
           </a:prstGeom>
           <a:extLst>
             <a:ext uri="{C572A759-6A51-4108-AA02-DFA0A04FC94B}">
-              <ma14:wrappingTextBoxFlag xmlns:ma14="http://schemas.microsoft.com/office/mac/drawingml/2011/main" val="0"/>
+              <ma14:wrappingTextBoxFlag xmlns:ma14="http://schemas.microsoft.com/office/mac/drawingml/2011/main" xmlns="" val="0"/>
             </a:ext>
           </a:extLst>
         </p:spPr>
@@ -3695,8 +3369,8 @@
           <a:p>
             <a:pPr algn="r"/>
             <a:fld id="{F7021451-1387-4CA6-816F-3879F97B5CBC}" type="slidenum">
-              <a:rPr b="0" lang="en-US"/>
-              <a:t>1003</a:t>
+              <a:rPr lang="en-US" b="0"/>
+              <a:t>‹#›</a:t>
             </a:fld>
             <a:endParaRPr lang="en-US"/>
           </a:p>
@@ -3713,6 +3387,11 @@
 <file path=ppt/slideMasters/slideMaster1.xml><?xml version="1.0" encoding="utf-8"?>
 <p:sldMaster xmlns:a="http://schemas.openxmlformats.org/drawingml/2006/main" xmlns:r="http://schemas.openxmlformats.org/officeDocument/2006/relationships" xmlns:p="http://schemas.openxmlformats.org/presentationml/2006/main">
   <p:cSld>
+    <p:bg>
+      <p:bgRef idx="1001">
+        <a:schemeClr val="bg1"/>
+      </p:bgRef>
+    </p:bg>
     <p:spTree>
       <p:nvGrpSpPr>
         <p:cNvPr id="1" name=""/>
@@ -3747,7 +3426,7 @@
           </a:prstGeom>
           <a:extLst>
             <a:ext uri="{C572A759-6A51-4108-AA02-DFA0A04FC94B}">
-              <ma14:wrappingTextBoxFlag xmlns:ma14="http://schemas.microsoft.com/office/mac/drawingml/2011/main" val="0"/>
+              <ma14:wrappingTextBoxFlag xmlns:ma14="http://schemas.microsoft.com/office/mac/drawingml/2011/main" xmlns="" val="0"/>
             </a:ext>
           </a:extLst>
         </p:spPr>
@@ -3768,8 +3447,8 @@
           <a:p>
             <a:pPr algn="r"/>
             <a:fld id="{F7021451-1387-4CA6-816F-3879F97B5CBC}" type="slidenum">
-              <a:rPr b="0" lang="en-US"/>
-              <a:t>null</a:t>
+              <a:rPr lang="en-US" b="0"/>
+              <a:t>‹#›</a:t>
             </a:fld>
             <a:endParaRPr lang="en-US"/>
           </a:p>
@@ -4057,9 +3736,11 @@
       <p:sp>
         <p:nvSpPr>
           <p:cNvPr id="2" name="Text 0"/>
-          <p:cNvSpPr/>
+          <p:cNvSpPr>
+            <a:spLocks noGrp="1"/>
+          </p:cNvSpPr>
           <p:nvPr>
-            <p:ph idx="100" type="title" hasCustomPrompt="1"/>
+            <p:ph type="title" idx="100" hasCustomPrompt="1"/>
           </p:nvPr>
         </p:nvSpPr>
         <p:spPr>
@@ -4077,7 +3758,7 @@
           <a:bodyPr wrap="square" lIns="0" tIns="0" rIns="0" bIns="0" rtlCol="0" anchor="b"/>
           <a:lstStyle/>
           <a:p>
-            <a:pPr algn="l" indent="0" marL="0">
+            <a:pPr marL="0" indent="0" algn="l">
               <a:buNone/>
             </a:pPr>
             <a:r>
@@ -4098,9 +3779,11 @@
       <p:sp>
         <p:nvSpPr>
           <p:cNvPr id="3" name="Text 0"/>
-          <p:cNvSpPr/>
+          <p:cNvSpPr>
+            <a:spLocks noGrp="1"/>
+          </p:cNvSpPr>
           <p:nvPr>
-            <p:ph idx="101" type="body" hasCustomPrompt="1"/>
+            <p:ph type="body" idx="101" hasCustomPrompt="1"/>
           </p:nvPr>
         </p:nvSpPr>
         <p:spPr>
@@ -4118,7 +3801,7 @@
           <a:bodyPr wrap="square" lIns="0" tIns="0" rIns="0" bIns="0" rtlCol="0" anchor="t"/>
           <a:lstStyle/>
           <a:p>
-            <a:pPr indent="0" marL="0">
+            <a:pPr marL="0" indent="0">
               <a:buNone/>
             </a:pPr>
             <a:r>
@@ -4135,7 +3818,7 @@
             <a:endParaRPr lang="en-US" sz="1600" dirty="0"/>
           </a:p>
           <a:p>
-            <a:pPr indent="0" marL="0">
+            <a:pPr marL="0" indent="0">
               <a:buNone/>
             </a:pPr>
             <a:r>
@@ -4181,9 +3864,11 @@
       <p:sp>
         <p:nvSpPr>
           <p:cNvPr id="2" name="Text 0"/>
-          <p:cNvSpPr/>
+          <p:cNvSpPr>
+            <a:spLocks noGrp="1"/>
+          </p:cNvSpPr>
           <p:nvPr>
-            <p:ph idx="100" type="title" hasCustomPrompt="1"/>
+            <p:ph type="title" idx="100" hasCustomPrompt="1"/>
           </p:nvPr>
         </p:nvSpPr>
         <p:spPr>
@@ -4201,7 +3886,7 @@
           <a:bodyPr wrap="square" lIns="0" tIns="0" rIns="0" bIns="0" rtlCol="0" anchor="ctr"/>
           <a:lstStyle/>
           <a:p>
-            <a:pPr algn="l" indent="0" marL="0">
+            <a:pPr marL="0" indent="0" algn="l">
               <a:buNone/>
             </a:pPr>
             <a:r>
@@ -4267,7 +3952,7 @@
           <a:bodyPr wrap="square" lIns="0" tIns="0" rIns="0" bIns="0" rtlCol="0" anchor="b"/>
           <a:lstStyle/>
           <a:p>
-            <a:pPr indent="0" marL="0">
+            <a:pPr marL="0" indent="0">
               <a:buNone/>
             </a:pPr>
             <a:r>
@@ -4306,7 +3991,7 @@
           <a:bodyPr wrap="square" lIns="0" tIns="0" rIns="0" bIns="0" rtlCol="0" anchor="t"/>
           <a:lstStyle/>
           <a:p>
-            <a:pPr indent="0" marL="0">
+            <a:pPr marL="0" indent="0">
               <a:buNone/>
             </a:pPr>
             <a:r>
@@ -4342,7 +4027,7 @@
           <a:bodyPr wrap="square" lIns="0" tIns="0" rIns="0" bIns="0" rtlCol="0" anchor="b"/>
           <a:lstStyle/>
           <a:p>
-            <a:pPr indent="0" marL="0">
+            <a:pPr marL="0" indent="0">
               <a:buNone/>
             </a:pPr>
             <a:r>
@@ -4381,7 +4066,7 @@
           <a:bodyPr wrap="square" lIns="0" tIns="0" rIns="0" bIns="0" rtlCol="0" anchor="t"/>
           <a:lstStyle/>
           <a:p>
-            <a:pPr indent="0" marL="0">
+            <a:pPr marL="0" indent="0">
               <a:buNone/>
             </a:pPr>
             <a:r>
@@ -4398,7 +4083,7 @@
       </p:sp>
       <p:graphicFrame>
         <p:nvGraphicFramePr>
-          <p:cNvPr id="9" name="chart_109" descr=""/>
+          <p:cNvPr id="9" name="chart_109"/>
           <p:cNvGraphicFramePr/>
           <p:nvPr/>
         </p:nvGraphicFramePr>
@@ -4406,9 +4091,9 @@
           <a:off x="4572000" y="1143000"/>
           <a:ext cx="4114800" cy="3429000"/>
         </p:xfrm>
-        <a:graphic xmlns:a="http://schemas.openxmlformats.org/drawingml/2006/main">
+        <a:graphic>
           <a:graphicData uri="http://schemas.openxmlformats.org/drawingml/2006/chart">
-            <c:chart xmlns:c="http://schemas.openxmlformats.org/drawingml/2006/chart" r:id="rId1"/>
+            <c:chart xmlns:c="http://schemas.openxmlformats.org/drawingml/2006/chart" xmlns:r="http://schemas.openxmlformats.org/officeDocument/2006/relationships" r:id="rId3"/>
           </a:graphicData>
         </a:graphic>
       </p:graphicFrame>
@@ -4432,7 +4117,7 @@
           </a:prstGeom>
           <a:extLst>
             <a:ext uri="{C572A759-6A51-4108-AA02-DFA0A04FC94B}">
-              <ma14:wrappingTextBoxFlag xmlns:ma14="http://schemas.microsoft.com/office/mac/drawingml/2011/main" val="0"/>
+              <ma14:wrappingTextBoxFlag xmlns:ma14="http://schemas.microsoft.com/office/mac/drawingml/2011/main" xmlns="" val="0"/>
             </a:ext>
           </a:extLst>
         </p:spPr>
@@ -4453,7 +4138,7 @@
           <a:p>
             <a:pPr algn="r"/>
             <a:fld id="{F7021451-1387-4CA6-816F-3879F97B5CBC}" type="slidenum">
-              <a:rPr b="0" lang="en-US"/>
+              <a:rPr lang="en-US" b="0"/>
               <a:t>10</a:t>
             </a:fld>
             <a:endParaRPr lang="en-US"/>
@@ -4488,9 +4173,11 @@
       <p:sp>
         <p:nvSpPr>
           <p:cNvPr id="2" name="Text 0"/>
-          <p:cNvSpPr/>
+          <p:cNvSpPr>
+            <a:spLocks noGrp="1"/>
+          </p:cNvSpPr>
           <p:nvPr>
-            <p:ph idx="100" type="title" hasCustomPrompt="1"/>
+            <p:ph type="title" idx="100" hasCustomPrompt="1"/>
           </p:nvPr>
         </p:nvSpPr>
         <p:spPr>
@@ -4508,7 +4195,7 @@
           <a:bodyPr wrap="square" lIns="0" tIns="0" rIns="0" bIns="0" rtlCol="0" anchor="ctr"/>
           <a:lstStyle/>
           <a:p>
-            <a:pPr algn="l" indent="0" marL="0">
+            <a:pPr marL="0" indent="0" algn="l">
               <a:buNone/>
             </a:pPr>
             <a:r>
@@ -4542,16 +4229,34 @@
         </p:nvGraphicFramePr>
         <p:xfrm>
           <a:off x="457200" y="1188720"/>
-          <a:ext cx="8229600" cy="914400"/>
+          <a:ext cx="8229600" cy="3017520"/>
         </p:xfrm>
         <a:graphic>
           <a:graphicData uri="http://schemas.openxmlformats.org/drawingml/2006/table">
             <a:tbl>
               <a:tblPr/>
               <a:tblGrid>
-                <a:gridCol w="2514600"/>
-                <a:gridCol w="2880360"/>
-                <a:gridCol w="2834640"/>
+                <a:gridCol w="2514600">
+                  <a:extLst>
+                    <a:ext uri="{9D8B030D-6E8A-4147-A177-3AD203B41FA5}">
+                      <a16:colId xmlns:a16="http://schemas.microsoft.com/office/drawing/2014/main" val="20000"/>
+                    </a:ext>
+                  </a:extLst>
+                </a:gridCol>
+                <a:gridCol w="2880360">
+                  <a:extLst>
+                    <a:ext uri="{9D8B030D-6E8A-4147-A177-3AD203B41FA5}">
+                      <a16:colId xmlns:a16="http://schemas.microsoft.com/office/drawing/2014/main" val="20001"/>
+                    </a:ext>
+                  </a:extLst>
+                </a:gridCol>
+                <a:gridCol w="2834640">
+                  <a:extLst>
+                    <a:ext uri="{9D8B030D-6E8A-4147-A177-3AD203B41FA5}">
+                      <a16:colId xmlns:a16="http://schemas.microsoft.com/office/drawing/2014/main" val="20002"/>
+                    </a:ext>
+                  </a:extLst>
+                </a:gridCol>
               </a:tblGrid>
               <a:tr h="502920">
                 <a:tc>
@@ -4559,7 +4264,7 @@
                     <a:bodyPr/>
                     <a:lstStyle/>
                     <a:p>
-                      <a:pPr indent="0" marL="0">
+                      <a:pPr marL="0" indent="0">
                         <a:buNone/>
                       </a:pPr>
                       <a:r>
@@ -4580,7 +4285,7 @@
                       </a:endParaRPr>
                     </a:p>
                   </a:txBody>
-                  <a:tcPr marL="91440" marR="91440" marT="0" marB="0" anchor="ctr">
+                  <a:tcPr marT="0" marB="0" anchor="ctr">
                     <a:lnL w="6350" cap="flat" cmpd="sng" algn="ctr">
                       <a:solidFill>
                         <a:srgbClr val="D5DED9"/>
@@ -4627,7 +4332,7 @@
                     <a:bodyPr/>
                     <a:lstStyle/>
                     <a:p>
-                      <a:pPr indent="0" marL="0">
+                      <a:pPr marL="0" indent="0">
                         <a:buNone/>
                       </a:pPr>
                       <a:r>
@@ -4648,7 +4353,7 @@
                       </a:endParaRPr>
                     </a:p>
                   </a:txBody>
-                  <a:tcPr marL="91440" marR="91440" marT="0" marB="0" anchor="ctr">
+                  <a:tcPr marT="0" marB="0" anchor="ctr">
                     <a:lnL w="6350" cap="flat" cmpd="sng" algn="ctr">
                       <a:solidFill>
                         <a:srgbClr val="D5DED9"/>
@@ -4695,7 +4400,7 @@
                     <a:bodyPr/>
                     <a:lstStyle/>
                     <a:p>
-                      <a:pPr indent="0" marL="0">
+                      <a:pPr marL="0" indent="0">
                         <a:buNone/>
                       </a:pPr>
                       <a:r>
@@ -4716,7 +4421,7 @@
                       </a:endParaRPr>
                     </a:p>
                   </a:txBody>
-                  <a:tcPr marL="91440" marR="91440" marT="0" marB="0" anchor="ctr">
+                  <a:tcPr marT="0" marB="0" anchor="ctr">
                     <a:lnL w="6350" cap="flat" cmpd="sng" algn="ctr">
                       <a:solidFill>
                         <a:srgbClr val="D5DED9"/>
@@ -4758,6 +4463,11 @@
                     </a:solidFill>
                   </a:tcPr>
                 </a:tc>
+                <a:extLst>
+                  <a:ext uri="{0D108BD9-81ED-4DB2-BD59-A6C34878D82A}">
+                    <a16:rowId xmlns:a16="http://schemas.microsoft.com/office/drawing/2014/main" val="10000"/>
+                  </a:ext>
+                </a:extLst>
               </a:tr>
               <a:tr h="502920">
                 <a:tc>
@@ -4765,7 +4475,7 @@
                     <a:bodyPr/>
                     <a:lstStyle/>
                     <a:p>
-                      <a:pPr indent="0" marL="0">
+                      <a:pPr marL="0" indent="0">
                         <a:buNone/>
                       </a:pPr>
                       <a:r>
@@ -4786,7 +4496,7 @@
                       </a:endParaRPr>
                     </a:p>
                   </a:txBody>
-                  <a:tcPr marL="91440" marR="91440" marT="0" marB="0" anchor="ctr">
+                  <a:tcPr marT="0" marB="0" anchor="ctr">
                     <a:lnL w="6350" cap="flat" cmpd="sng" algn="ctr">
                       <a:solidFill>
                         <a:srgbClr val="D5DED9"/>
@@ -4833,7 +4543,7 @@
                     <a:bodyPr/>
                     <a:lstStyle/>
                     <a:p>
-                      <a:pPr indent="0" marL="0">
+                      <a:pPr marL="0" indent="0">
                         <a:buNone/>
                       </a:pPr>
                       <a:r>
@@ -4854,7 +4564,7 @@
                       </a:endParaRPr>
                     </a:p>
                   </a:txBody>
-                  <a:tcPr marL="91440" marR="91440" marT="0" marB="0" anchor="ctr">
+                  <a:tcPr marT="0" marB="0" anchor="ctr">
                     <a:lnL w="6350" cap="flat" cmpd="sng" algn="ctr">
                       <a:solidFill>
                         <a:srgbClr val="D5DED9"/>
@@ -4901,7 +4611,7 @@
                     <a:bodyPr/>
                     <a:lstStyle/>
                     <a:p>
-                      <a:pPr indent="0" marL="0">
+                      <a:pPr marL="0" indent="0">
                         <a:buNone/>
                       </a:pPr>
                       <a:r>
@@ -4922,7 +4632,7 @@
                       </a:endParaRPr>
                     </a:p>
                   </a:txBody>
-                  <a:tcPr marL="91440" marR="91440" marT="0" marB="0" anchor="ctr">
+                  <a:tcPr marT="0" marB="0" anchor="ctr">
                     <a:lnL w="6350" cap="flat" cmpd="sng" algn="ctr">
                       <a:solidFill>
                         <a:srgbClr val="D5DED9"/>
@@ -4964,6 +4674,11 @@
                     </a:solidFill>
                   </a:tcPr>
                 </a:tc>
+                <a:extLst>
+                  <a:ext uri="{0D108BD9-81ED-4DB2-BD59-A6C34878D82A}">
+                    <a16:rowId xmlns:a16="http://schemas.microsoft.com/office/drawing/2014/main" val="10001"/>
+                  </a:ext>
+                </a:extLst>
               </a:tr>
               <a:tr h="502920">
                 <a:tc>
@@ -4971,7 +4686,7 @@
                     <a:bodyPr/>
                     <a:lstStyle/>
                     <a:p>
-                      <a:pPr indent="0" marL="0">
+                      <a:pPr marL="0" indent="0">
                         <a:buNone/>
                       </a:pPr>
                       <a:r>
@@ -4992,7 +4707,7 @@
                       </a:endParaRPr>
                     </a:p>
                   </a:txBody>
-                  <a:tcPr marL="91440" marR="91440" marT="0" marB="0" anchor="ctr">
+                  <a:tcPr marT="0" marB="0" anchor="ctr">
                     <a:lnL w="6350" cap="flat" cmpd="sng" algn="ctr">
                       <a:solidFill>
                         <a:srgbClr val="D5DED9"/>
@@ -5039,7 +4754,7 @@
                     <a:bodyPr/>
                     <a:lstStyle/>
                     <a:p>
-                      <a:pPr indent="0" marL="0">
+                      <a:pPr marL="0" indent="0">
                         <a:buNone/>
                       </a:pPr>
                       <a:r>
@@ -5060,7 +4775,7 @@
                       </a:endParaRPr>
                     </a:p>
                   </a:txBody>
-                  <a:tcPr marL="91440" marR="91440" marT="0" marB="0" anchor="ctr">
+                  <a:tcPr marT="0" marB="0" anchor="ctr">
                     <a:lnL w="6350" cap="flat" cmpd="sng" algn="ctr">
                       <a:solidFill>
                         <a:srgbClr val="D5DED9"/>
@@ -5107,7 +4822,7 @@
                     <a:bodyPr/>
                     <a:lstStyle/>
                     <a:p>
-                      <a:pPr indent="0" marL="0">
+                      <a:pPr marL="0" indent="0">
                         <a:buNone/>
                       </a:pPr>
                       <a:r>
@@ -5128,7 +4843,7 @@
                       </a:endParaRPr>
                     </a:p>
                   </a:txBody>
-                  <a:tcPr marL="91440" marR="91440" marT="0" marB="0" anchor="ctr">
+                  <a:tcPr marT="0" marB="0" anchor="ctr">
                     <a:lnL w="6350" cap="flat" cmpd="sng" algn="ctr">
                       <a:solidFill>
                         <a:srgbClr val="D5DED9"/>
@@ -5170,6 +4885,11 @@
                     </a:solidFill>
                   </a:tcPr>
                 </a:tc>
+                <a:extLst>
+                  <a:ext uri="{0D108BD9-81ED-4DB2-BD59-A6C34878D82A}">
+                    <a16:rowId xmlns:a16="http://schemas.microsoft.com/office/drawing/2014/main" val="10002"/>
+                  </a:ext>
+                </a:extLst>
               </a:tr>
               <a:tr h="502920">
                 <a:tc>
@@ -5177,7 +4897,7 @@
                     <a:bodyPr/>
                     <a:lstStyle/>
                     <a:p>
-                      <a:pPr indent="0" marL="0">
+                      <a:pPr marL="0" indent="0">
                         <a:buNone/>
                       </a:pPr>
                       <a:r>
@@ -5198,7 +4918,7 @@
                       </a:endParaRPr>
                     </a:p>
                   </a:txBody>
-                  <a:tcPr marL="91440" marR="91440" marT="0" marB="0" anchor="ctr">
+                  <a:tcPr marT="0" marB="0" anchor="ctr">
                     <a:lnL w="6350" cap="flat" cmpd="sng" algn="ctr">
                       <a:solidFill>
                         <a:srgbClr val="D5DED9"/>
@@ -5245,7 +4965,7 @@
                     <a:bodyPr/>
                     <a:lstStyle/>
                     <a:p>
-                      <a:pPr indent="0" marL="0">
+                      <a:pPr marL="0" indent="0">
                         <a:buNone/>
                       </a:pPr>
                       <a:r>
@@ -5266,7 +4986,7 @@
                       </a:endParaRPr>
                     </a:p>
                   </a:txBody>
-                  <a:tcPr marL="91440" marR="91440" marT="0" marB="0" anchor="ctr">
+                  <a:tcPr marT="0" marB="0" anchor="ctr">
                     <a:lnL w="6350" cap="flat" cmpd="sng" algn="ctr">
                       <a:solidFill>
                         <a:srgbClr val="D5DED9"/>
@@ -5313,7 +5033,7 @@
                     <a:bodyPr/>
                     <a:lstStyle/>
                     <a:p>
-                      <a:pPr indent="0" marL="0">
+                      <a:pPr marL="0" indent="0">
                         <a:buNone/>
                       </a:pPr>
                       <a:r>
@@ -5334,7 +5054,7 @@
                       </a:endParaRPr>
                     </a:p>
                   </a:txBody>
-                  <a:tcPr marL="91440" marR="91440" marT="0" marB="0" anchor="ctr">
+                  <a:tcPr marT="0" marB="0" anchor="ctr">
                     <a:lnL w="6350" cap="flat" cmpd="sng" algn="ctr">
                       <a:solidFill>
                         <a:srgbClr val="D5DED9"/>
@@ -5376,6 +5096,11 @@
                     </a:solidFill>
                   </a:tcPr>
                 </a:tc>
+                <a:extLst>
+                  <a:ext uri="{0D108BD9-81ED-4DB2-BD59-A6C34878D82A}">
+                    <a16:rowId xmlns:a16="http://schemas.microsoft.com/office/drawing/2014/main" val="10003"/>
+                  </a:ext>
+                </a:extLst>
               </a:tr>
               <a:tr h="502920">
                 <a:tc>
@@ -5383,7 +5108,7 @@
                     <a:bodyPr/>
                     <a:lstStyle/>
                     <a:p>
-                      <a:pPr indent="0" marL="0">
+                      <a:pPr marL="0" indent="0">
                         <a:buNone/>
                       </a:pPr>
                       <a:r>
@@ -5404,7 +5129,7 @@
                       </a:endParaRPr>
                     </a:p>
                   </a:txBody>
-                  <a:tcPr marL="91440" marR="91440" marT="0" marB="0" anchor="ctr">
+                  <a:tcPr marT="0" marB="0" anchor="ctr">
                     <a:lnL w="6350" cap="flat" cmpd="sng" algn="ctr">
                       <a:solidFill>
                         <a:srgbClr val="D5DED9"/>
@@ -5451,7 +5176,7 @@
                     <a:bodyPr/>
                     <a:lstStyle/>
                     <a:p>
-                      <a:pPr indent="0" marL="0">
+                      <a:pPr marL="0" indent="0">
                         <a:buNone/>
                       </a:pPr>
                       <a:r>
@@ -5472,7 +5197,7 @@
                       </a:endParaRPr>
                     </a:p>
                   </a:txBody>
-                  <a:tcPr marL="91440" marR="91440" marT="0" marB="0" anchor="ctr">
+                  <a:tcPr marT="0" marB="0" anchor="ctr">
                     <a:lnL w="6350" cap="flat" cmpd="sng" algn="ctr">
                       <a:solidFill>
                         <a:srgbClr val="D5DED9"/>
@@ -5519,7 +5244,7 @@
                     <a:bodyPr/>
                     <a:lstStyle/>
                     <a:p>
-                      <a:pPr indent="0" marL="0">
+                      <a:pPr marL="0" indent="0">
                         <a:buNone/>
                       </a:pPr>
                       <a:r>
@@ -5540,7 +5265,7 @@
                       </a:endParaRPr>
                     </a:p>
                   </a:txBody>
-                  <a:tcPr marL="91440" marR="91440" marT="0" marB="0" anchor="ctr">
+                  <a:tcPr marT="0" marB="0" anchor="ctr">
                     <a:lnL w="6350" cap="flat" cmpd="sng" algn="ctr">
                       <a:solidFill>
                         <a:srgbClr val="D5DED9"/>
@@ -5582,6 +5307,11 @@
                     </a:solidFill>
                   </a:tcPr>
                 </a:tc>
+                <a:extLst>
+                  <a:ext uri="{0D108BD9-81ED-4DB2-BD59-A6C34878D82A}">
+                    <a16:rowId xmlns:a16="http://schemas.microsoft.com/office/drawing/2014/main" val="10004"/>
+                  </a:ext>
+                </a:extLst>
               </a:tr>
               <a:tr h="502920">
                 <a:tc>
@@ -5589,7 +5319,7 @@
                     <a:bodyPr/>
                     <a:lstStyle/>
                     <a:p>
-                      <a:pPr indent="0" marL="0">
+                      <a:pPr marL="0" indent="0">
                         <a:buNone/>
                       </a:pPr>
                       <a:r>
@@ -5610,7 +5340,7 @@
                       </a:endParaRPr>
                     </a:p>
                   </a:txBody>
-                  <a:tcPr marL="91440" marR="91440" marT="0" marB="0" anchor="ctr">
+                  <a:tcPr marT="0" marB="0" anchor="ctr">
                     <a:lnL w="6350" cap="flat" cmpd="sng" algn="ctr">
                       <a:solidFill>
                         <a:srgbClr val="D5DED9"/>
@@ -5657,7 +5387,7 @@
                     <a:bodyPr/>
                     <a:lstStyle/>
                     <a:p>
-                      <a:pPr indent="0" marL="0">
+                      <a:pPr marL="0" indent="0">
                         <a:buNone/>
                       </a:pPr>
                       <a:r>
@@ -5678,7 +5408,7 @@
                       </a:endParaRPr>
                     </a:p>
                   </a:txBody>
-                  <a:tcPr marL="91440" marR="91440" marT="0" marB="0" anchor="ctr">
+                  <a:tcPr marT="0" marB="0" anchor="ctr">
                     <a:lnL w="6350" cap="flat" cmpd="sng" algn="ctr">
                       <a:solidFill>
                         <a:srgbClr val="D5DED9"/>
@@ -5725,7 +5455,7 @@
                     <a:bodyPr/>
                     <a:lstStyle/>
                     <a:p>
-                      <a:pPr indent="0" marL="0">
+                      <a:pPr marL="0" indent="0">
                         <a:buNone/>
                       </a:pPr>
                       <a:r>
@@ -5746,7 +5476,7 @@
                       </a:endParaRPr>
                     </a:p>
                   </a:txBody>
-                  <a:tcPr marL="91440" marR="91440" marT="0" marB="0" anchor="ctr">
+                  <a:tcPr marT="0" marB="0" anchor="ctr">
                     <a:lnL w="6350" cap="flat" cmpd="sng" algn="ctr">
                       <a:solidFill>
                         <a:srgbClr val="D5DED9"/>
@@ -5788,6 +5518,11 @@
                     </a:solidFill>
                   </a:tcPr>
                 </a:tc>
+                <a:extLst>
+                  <a:ext uri="{0D108BD9-81ED-4DB2-BD59-A6C34878D82A}">
+                    <a16:rowId xmlns:a16="http://schemas.microsoft.com/office/drawing/2014/main" val="10005"/>
+                  </a:ext>
+                </a:extLst>
               </a:tr>
             </a:tbl>
           </a:graphicData>
@@ -5813,7 +5548,7 @@
           </a:prstGeom>
           <a:extLst>
             <a:ext uri="{C572A759-6A51-4108-AA02-DFA0A04FC94B}">
-              <ma14:wrappingTextBoxFlag xmlns:ma14="http://schemas.microsoft.com/office/mac/drawingml/2011/main" val="0"/>
+              <ma14:wrappingTextBoxFlag xmlns:ma14="http://schemas.microsoft.com/office/mac/drawingml/2011/main" xmlns="" val="0"/>
             </a:ext>
           </a:extLst>
         </p:spPr>
@@ -5834,7 +5569,7 @@
           <a:p>
             <a:pPr algn="r"/>
             <a:fld id="{F7021451-1387-4CA6-816F-3879F97B5CBC}" type="slidenum">
-              <a:rPr b="0" lang="en-US"/>
+              <a:rPr lang="en-US" b="0"/>
               <a:t>11</a:t>
             </a:fld>
             <a:endParaRPr lang="en-US"/>
@@ -5869,9 +5604,11 @@
       <p:sp>
         <p:nvSpPr>
           <p:cNvPr id="2" name="Text 0"/>
-          <p:cNvSpPr/>
+          <p:cNvSpPr>
+            <a:spLocks noGrp="1"/>
+          </p:cNvSpPr>
           <p:nvPr>
-            <p:ph idx="100" type="title" hasCustomPrompt="1"/>
+            <p:ph type="title" idx="100" hasCustomPrompt="1"/>
           </p:nvPr>
         </p:nvSpPr>
         <p:spPr>
@@ -5889,7 +5626,7 @@
           <a:bodyPr wrap="square" lIns="0" tIns="0" rIns="0" bIns="0" rtlCol="0" anchor="ctr"/>
           <a:lstStyle/>
           <a:p>
-            <a:pPr algn="l" indent="0" marL="0">
+            <a:pPr marL="0" indent="0" algn="l">
               <a:buNone/>
             </a:pPr>
             <a:r>
@@ -5953,7 +5690,7 @@
           <a:bodyPr wrap="square" lIns="0" tIns="0" rIns="0" bIns="0" rtlCol="0" anchor="ctr"/>
           <a:lstStyle/>
           <a:p>
-            <a:pPr algn="ctr" indent="0" marL="0">
+            <a:pPr marL="0" indent="0" algn="ctr">
               <a:buNone/>
             </a:pPr>
             <a:r>
@@ -5992,7 +5729,7 @@
           <a:bodyPr wrap="square" lIns="0" tIns="0" rIns="0" bIns="0" rtlCol="0" anchor="ctr"/>
           <a:lstStyle/>
           <a:p>
-            <a:pPr indent="0" marL="0">
+            <a:pPr marL="0" indent="0">
               <a:buNone/>
             </a:pPr>
             <a:r>
@@ -6028,7 +5765,7 @@
           <a:bodyPr wrap="square" lIns="0" tIns="0" rIns="0" bIns="0" rtlCol="0" anchor="ctr"/>
           <a:lstStyle/>
           <a:p>
-            <a:pPr indent="0" marL="0">
+            <a:pPr marL="0" indent="0">
               <a:buNone/>
             </a:pPr>
             <a:r>
@@ -6089,7 +5826,7 @@
           <a:bodyPr wrap="square" lIns="0" tIns="0" rIns="0" bIns="0" rtlCol="0" anchor="ctr"/>
           <a:lstStyle/>
           <a:p>
-            <a:pPr algn="ctr" indent="0" marL="0">
+            <a:pPr marL="0" indent="0" algn="ctr">
               <a:buNone/>
             </a:pPr>
             <a:r>
@@ -6128,7 +5865,7 @@
           <a:bodyPr wrap="square" lIns="0" tIns="0" rIns="0" bIns="0" rtlCol="0" anchor="ctr"/>
           <a:lstStyle/>
           <a:p>
-            <a:pPr indent="0" marL="0">
+            <a:pPr marL="0" indent="0">
               <a:buNone/>
             </a:pPr>
             <a:r>
@@ -6164,7 +5901,7 @@
           <a:bodyPr wrap="square" lIns="0" tIns="0" rIns="0" bIns="0" rtlCol="0" anchor="ctr"/>
           <a:lstStyle/>
           <a:p>
-            <a:pPr indent="0" marL="0">
+            <a:pPr marL="0" indent="0">
               <a:buNone/>
             </a:pPr>
             <a:r>
@@ -6225,7 +5962,7 @@
           <a:bodyPr wrap="square" lIns="0" tIns="0" rIns="0" bIns="0" rtlCol="0" anchor="ctr"/>
           <a:lstStyle/>
           <a:p>
-            <a:pPr algn="ctr" indent="0" marL="0">
+            <a:pPr marL="0" indent="0" algn="ctr">
               <a:buNone/>
             </a:pPr>
             <a:r>
@@ -6264,7 +6001,7 @@
           <a:bodyPr wrap="square" lIns="0" tIns="0" rIns="0" bIns="0" rtlCol="0" anchor="ctr"/>
           <a:lstStyle/>
           <a:p>
-            <a:pPr indent="0" marL="0">
+            <a:pPr marL="0" indent="0">
               <a:buNone/>
             </a:pPr>
             <a:r>
@@ -6300,7 +6037,7 @@
           <a:bodyPr wrap="square" lIns="0" tIns="0" rIns="0" bIns="0" rtlCol="0" anchor="ctr"/>
           <a:lstStyle/>
           <a:p>
-            <a:pPr indent="0" marL="0">
+            <a:pPr marL="0" indent="0">
               <a:buNone/>
             </a:pPr>
             <a:r>
@@ -6361,7 +6098,7 @@
           <a:bodyPr wrap="square" lIns="0" tIns="0" rIns="0" bIns="0" rtlCol="0" anchor="ctr"/>
           <a:lstStyle/>
           <a:p>
-            <a:pPr algn="ctr" indent="0" marL="0">
+            <a:pPr marL="0" indent="0" algn="ctr">
               <a:buNone/>
             </a:pPr>
             <a:r>
@@ -6400,7 +6137,7 @@
           <a:bodyPr wrap="square" lIns="0" tIns="0" rIns="0" bIns="0" rtlCol="0" anchor="ctr"/>
           <a:lstStyle/>
           <a:p>
-            <a:pPr indent="0" marL="0">
+            <a:pPr marL="0" indent="0">
               <a:buNone/>
             </a:pPr>
             <a:r>
@@ -6436,7 +6173,7 @@
           <a:bodyPr wrap="square" lIns="0" tIns="0" rIns="0" bIns="0" rtlCol="0" anchor="ctr"/>
           <a:lstStyle/>
           <a:p>
-            <a:pPr indent="0" marL="0">
+            <a:pPr marL="0" indent="0">
               <a:buNone/>
             </a:pPr>
             <a:r>
@@ -6497,7 +6234,7 @@
           <a:bodyPr wrap="square" lIns="0" tIns="0" rIns="0" bIns="0" rtlCol="0" anchor="ctr"/>
           <a:lstStyle/>
           <a:p>
-            <a:pPr algn="ctr" indent="0" marL="0">
+            <a:pPr marL="0" indent="0" algn="ctr">
               <a:buNone/>
             </a:pPr>
             <a:r>
@@ -6536,7 +6273,7 @@
           <a:bodyPr wrap="square" lIns="0" tIns="0" rIns="0" bIns="0" rtlCol="0" anchor="ctr"/>
           <a:lstStyle/>
           <a:p>
-            <a:pPr indent="0" marL="0">
+            <a:pPr marL="0" indent="0">
               <a:buNone/>
             </a:pPr>
             <a:r>
@@ -6572,7 +6309,7 @@
           <a:bodyPr wrap="square" lIns="0" tIns="0" rIns="0" bIns="0" rtlCol="0" anchor="ctr"/>
           <a:lstStyle/>
           <a:p>
-            <a:pPr indent="0" marL="0">
+            <a:pPr marL="0" indent="0">
               <a:buNone/>
             </a:pPr>
             <a:r>
@@ -6607,7 +6344,7 @@
           </a:prstGeom>
           <a:extLst>
             <a:ext uri="{C572A759-6A51-4108-AA02-DFA0A04FC94B}">
-              <ma14:wrappingTextBoxFlag xmlns:ma14="http://schemas.microsoft.com/office/mac/drawingml/2011/main" val="0"/>
+              <ma14:wrappingTextBoxFlag xmlns:ma14="http://schemas.microsoft.com/office/mac/drawingml/2011/main" xmlns="" val="0"/>
             </a:ext>
           </a:extLst>
         </p:spPr>
@@ -6628,7 +6365,7 @@
           <a:p>
             <a:pPr algn="r"/>
             <a:fld id="{F7021451-1387-4CA6-816F-3879F97B5CBC}" type="slidenum">
-              <a:rPr b="0" lang="en-US"/>
+              <a:rPr lang="en-US" b="0"/>
               <a:t>12</a:t>
             </a:fld>
             <a:endParaRPr lang="en-US"/>
@@ -6663,9 +6400,11 @@
       <p:sp>
         <p:nvSpPr>
           <p:cNvPr id="2" name="Text 0"/>
-          <p:cNvSpPr/>
+          <p:cNvSpPr>
+            <a:spLocks noGrp="1"/>
+          </p:cNvSpPr>
           <p:nvPr>
-            <p:ph idx="100" type="title" hasCustomPrompt="1"/>
+            <p:ph type="title" idx="100" hasCustomPrompt="1"/>
           </p:nvPr>
         </p:nvSpPr>
         <p:spPr>
@@ -6683,7 +6422,7 @@
           <a:bodyPr wrap="square" lIns="0" tIns="0" rIns="0" bIns="0" rtlCol="0" anchor="b"/>
           <a:lstStyle/>
           <a:p>
-            <a:pPr algn="l" indent="0" marL="0">
+            <a:pPr marL="0" indent="0" algn="l">
               <a:buNone/>
             </a:pPr>
             <a:r>
@@ -6704,9 +6443,11 @@
       <p:sp>
         <p:nvSpPr>
           <p:cNvPr id="3" name="Text 0"/>
-          <p:cNvSpPr/>
+          <p:cNvSpPr>
+            <a:spLocks noGrp="1"/>
+          </p:cNvSpPr>
           <p:nvPr>
-            <p:ph idx="101" type="body" hasCustomPrompt="1"/>
+            <p:ph type="body" idx="101" hasCustomPrompt="1"/>
           </p:nvPr>
         </p:nvSpPr>
         <p:spPr>
@@ -6724,7 +6465,7 @@
           <a:bodyPr wrap="square" lIns="0" tIns="0" rIns="0" bIns="0" rtlCol="0" anchor="t"/>
           <a:lstStyle/>
           <a:p>
-            <a:pPr indent="0" marL="0">
+            <a:pPr marL="0" indent="0">
               <a:buNone/>
             </a:pPr>
             <a:r>
@@ -6741,7 +6482,7 @@
             <a:endParaRPr lang="en-US" sz="1600" dirty="0"/>
           </a:p>
           <a:p>
-            <a:pPr indent="0" marL="0">
+            <a:pPr marL="0" indent="0">
               <a:buNone/>
             </a:pPr>
             <a:r>
@@ -6787,9 +6528,11 @@
       <p:sp>
         <p:nvSpPr>
           <p:cNvPr id="2" name="Text 0"/>
-          <p:cNvSpPr/>
+          <p:cNvSpPr>
+            <a:spLocks noGrp="1"/>
+          </p:cNvSpPr>
           <p:nvPr>
-            <p:ph idx="100" type="title" hasCustomPrompt="1"/>
+            <p:ph type="title" idx="100" hasCustomPrompt="1"/>
           </p:nvPr>
         </p:nvSpPr>
         <p:spPr>
@@ -6807,7 +6550,7 @@
           <a:bodyPr wrap="square" lIns="0" tIns="0" rIns="0" bIns="0" rtlCol="0" anchor="ctr"/>
           <a:lstStyle/>
           <a:p>
-            <a:pPr algn="l" indent="0" marL="0">
+            <a:pPr marL="0" indent="0" algn="l">
               <a:buNone/>
             </a:pPr>
             <a:r>
@@ -6873,7 +6616,7 @@
           <a:bodyPr wrap="square" lIns="0" tIns="0" rIns="0" bIns="0" rtlCol="0" anchor="b"/>
           <a:lstStyle/>
           <a:p>
-            <a:pPr indent="0" marL="0">
+            <a:pPr marL="0" indent="0">
               <a:buNone/>
             </a:pPr>
             <a:r>
@@ -6912,7 +6655,7 @@
           <a:bodyPr wrap="square" lIns="0" tIns="0" rIns="0" bIns="0" rtlCol="0" anchor="t"/>
           <a:lstStyle/>
           <a:p>
-            <a:pPr indent="0" marL="0">
+            <a:pPr marL="0" indent="0">
               <a:buNone/>
             </a:pPr>
             <a:r>
@@ -6935,7 +6678,7 @@
         </p:nvSpPr>
         <p:spPr>
           <a:xfrm>
-            <a:off x="685800" y="2880360"/>
+            <a:off x="630936" y="2880360"/>
             <a:ext cx="2194560" cy="731520"/>
           </a:xfrm>
           <a:prstGeom prst="rect">
@@ -6948,7 +6691,7 @@
           <a:bodyPr wrap="square" lIns="0" tIns="0" rIns="0" bIns="0" rtlCol="0" anchor="t"/>
           <a:lstStyle/>
           <a:p>
-            <a:pPr indent="0" marL="0">
+            <a:pPr marL="0" indent="0">
               <a:buNone/>
             </a:pPr>
             <a:r>
@@ -7011,7 +6754,7 @@
           <a:bodyPr wrap="square" lIns="0" tIns="0" rIns="0" bIns="0" rtlCol="0" anchor="b"/>
           <a:lstStyle/>
           <a:p>
-            <a:pPr indent="0" marL="0">
+            <a:pPr marL="0" indent="0">
               <a:buNone/>
             </a:pPr>
             <a:r>
@@ -7050,7 +6793,7 @@
           <a:bodyPr wrap="square" lIns="0" tIns="0" rIns="0" bIns="0" rtlCol="0" anchor="t"/>
           <a:lstStyle/>
           <a:p>
-            <a:pPr indent="0" marL="0">
+            <a:pPr marL="0" indent="0">
               <a:buNone/>
             </a:pPr>
             <a:r>
@@ -7086,7 +6829,7 @@
           <a:bodyPr wrap="square" lIns="0" tIns="0" rIns="0" bIns="0" rtlCol="0" anchor="t"/>
           <a:lstStyle/>
           <a:p>
-            <a:pPr indent="0" marL="0">
+            <a:pPr marL="0" indent="0">
               <a:buNone/>
             </a:pPr>
             <a:r>
@@ -7149,7 +6892,7 @@
           <a:bodyPr wrap="square" lIns="0" tIns="0" rIns="0" bIns="0" rtlCol="0" anchor="b"/>
           <a:lstStyle/>
           <a:p>
-            <a:pPr indent="0" marL="0">
+            <a:pPr marL="0" indent="0">
               <a:buNone/>
             </a:pPr>
             <a:r>
@@ -7188,7 +6931,7 @@
           <a:bodyPr wrap="square" lIns="0" tIns="0" rIns="0" bIns="0" rtlCol="0" anchor="t"/>
           <a:lstStyle/>
           <a:p>
-            <a:pPr indent="0" marL="0">
+            <a:pPr marL="0" indent="0">
               <a:buNone/>
             </a:pPr>
             <a:r>
@@ -7224,7 +6967,7 @@
           <a:bodyPr wrap="square" lIns="0" tIns="0" rIns="0" bIns="0" rtlCol="0" anchor="t"/>
           <a:lstStyle/>
           <a:p>
-            <a:pPr indent="0" marL="0">
+            <a:pPr marL="0" indent="0">
               <a:buNone/>
             </a:pPr>
             <a:r>
@@ -7260,7 +7003,7 @@
           <a:bodyPr wrap="square" lIns="0" tIns="0" rIns="0" bIns="0" rtlCol="0" anchor="ctr"/>
           <a:lstStyle/>
           <a:p>
-            <a:pPr indent="0" marL="0">
+            <a:pPr marL="0" indent="0">
               <a:buNone/>
             </a:pPr>
             <a:r>
@@ -7295,7 +7038,7 @@
           </a:prstGeom>
           <a:extLst>
             <a:ext uri="{C572A759-6A51-4108-AA02-DFA0A04FC94B}">
-              <ma14:wrappingTextBoxFlag xmlns:ma14="http://schemas.microsoft.com/office/mac/drawingml/2011/main" val="0"/>
+              <ma14:wrappingTextBoxFlag xmlns:ma14="http://schemas.microsoft.com/office/mac/drawingml/2011/main" xmlns="" val="0"/>
             </a:ext>
           </a:extLst>
         </p:spPr>
@@ -7316,7 +7059,7 @@
           <a:p>
             <a:pPr algn="r"/>
             <a:fld id="{F7021451-1387-4CA6-816F-3879F97B5CBC}" type="slidenum">
-              <a:rPr b="0" lang="en-US"/>
+              <a:rPr lang="en-US" b="0"/>
               <a:t>2</a:t>
             </a:fld>
             <a:endParaRPr lang="en-US"/>
@@ -7351,9 +7094,11 @@
       <p:sp>
         <p:nvSpPr>
           <p:cNvPr id="2" name="Text 0"/>
-          <p:cNvSpPr/>
+          <p:cNvSpPr>
+            <a:spLocks noGrp="1"/>
+          </p:cNvSpPr>
           <p:nvPr>
-            <p:ph idx="100" type="title" hasCustomPrompt="1"/>
+            <p:ph type="title" idx="100" hasCustomPrompt="1"/>
           </p:nvPr>
         </p:nvSpPr>
         <p:spPr>
@@ -7371,7 +7116,7 @@
           <a:bodyPr wrap="square" lIns="0" tIns="0" rIns="0" bIns="0" rtlCol="0" anchor="ctr"/>
           <a:lstStyle/>
           <a:p>
-            <a:pPr algn="l" indent="0" marL="0">
+            <a:pPr marL="0" indent="0" algn="l">
               <a:buNone/>
             </a:pPr>
             <a:r>
@@ -7462,7 +7207,7 @@
           <a:bodyPr wrap="square" lIns="0" tIns="0" rIns="0" bIns="0" rtlCol="0" anchor="ctr"/>
           <a:lstStyle/>
           <a:p>
-            <a:pPr algn="ctr" indent="0" marL="0">
+            <a:pPr marL="0" indent="0" algn="ctr">
               <a:buNone/>
             </a:pPr>
             <a:r>
@@ -7501,7 +7246,7 @@
           <a:bodyPr wrap="square" lIns="0" tIns="0" rIns="0" bIns="0" rtlCol="0" anchor="ctr"/>
           <a:lstStyle/>
           <a:p>
-            <a:pPr indent="0" marL="0">
+            <a:pPr marL="0" indent="0">
               <a:buNone/>
             </a:pPr>
             <a:r>
@@ -7537,7 +7282,7 @@
           <a:bodyPr wrap="square" lIns="0" tIns="0" rIns="0" bIns="0" rtlCol="0" anchor="t"/>
           <a:lstStyle/>
           <a:p>
-            <a:pPr indent="0" marL="0">
+            <a:pPr marL="0" indent="0">
               <a:buNone/>
             </a:pPr>
             <a:r>
@@ -7625,7 +7370,7 @@
           <a:bodyPr wrap="square" lIns="0" tIns="0" rIns="0" bIns="0" rtlCol="0" anchor="ctr"/>
           <a:lstStyle/>
           <a:p>
-            <a:pPr algn="ctr" indent="0" marL="0">
+            <a:pPr marL="0" indent="0" algn="ctr">
               <a:buNone/>
             </a:pPr>
             <a:r>
@@ -7664,7 +7409,7 @@
           <a:bodyPr wrap="square" lIns="0" tIns="0" rIns="0" bIns="0" rtlCol="0" anchor="ctr"/>
           <a:lstStyle/>
           <a:p>
-            <a:pPr indent="0" marL="0">
+            <a:pPr marL="0" indent="0">
               <a:buNone/>
             </a:pPr>
             <a:r>
@@ -7700,7 +7445,7 @@
           <a:bodyPr wrap="square" lIns="0" tIns="0" rIns="0" bIns="0" rtlCol="0" anchor="t"/>
           <a:lstStyle/>
           <a:p>
-            <a:pPr indent="0" marL="0">
+            <a:pPr marL="0" indent="0">
               <a:buNone/>
             </a:pPr>
             <a:r>
@@ -7788,7 +7533,7 @@
           <a:bodyPr wrap="square" lIns="0" tIns="0" rIns="0" bIns="0" rtlCol="0" anchor="ctr"/>
           <a:lstStyle/>
           <a:p>
-            <a:pPr algn="ctr" indent="0" marL="0">
+            <a:pPr marL="0" indent="0" algn="ctr">
               <a:buNone/>
             </a:pPr>
             <a:r>
@@ -7827,7 +7572,7 @@
           <a:bodyPr wrap="square" lIns="0" tIns="0" rIns="0" bIns="0" rtlCol="0" anchor="ctr"/>
           <a:lstStyle/>
           <a:p>
-            <a:pPr indent="0" marL="0">
+            <a:pPr marL="0" indent="0">
               <a:buNone/>
             </a:pPr>
             <a:r>
@@ -7863,7 +7608,7 @@
           <a:bodyPr wrap="square" lIns="0" tIns="0" rIns="0" bIns="0" rtlCol="0" anchor="t"/>
           <a:lstStyle/>
           <a:p>
-            <a:pPr indent="0" marL="0">
+            <a:pPr marL="0" indent="0">
               <a:buNone/>
             </a:pPr>
             <a:r>
@@ -7951,7 +7696,7 @@
           <a:bodyPr wrap="square" lIns="0" tIns="0" rIns="0" bIns="0" rtlCol="0" anchor="ctr"/>
           <a:lstStyle/>
           <a:p>
-            <a:pPr algn="ctr" indent="0" marL="0">
+            <a:pPr marL="0" indent="0" algn="ctr">
               <a:buNone/>
             </a:pPr>
             <a:r>
@@ -7990,7 +7735,7 @@
           <a:bodyPr wrap="square" lIns="0" tIns="0" rIns="0" bIns="0" rtlCol="0" anchor="ctr"/>
           <a:lstStyle/>
           <a:p>
-            <a:pPr indent="0" marL="0">
+            <a:pPr marL="0" indent="0">
               <a:buNone/>
             </a:pPr>
             <a:r>
@@ -8026,7 +7771,7 @@
           <a:bodyPr wrap="square" lIns="0" tIns="0" rIns="0" bIns="0" rtlCol="0" anchor="t"/>
           <a:lstStyle/>
           <a:p>
-            <a:pPr indent="0" marL="0">
+            <a:pPr marL="0" indent="0">
               <a:buNone/>
             </a:pPr>
             <a:r>
@@ -8114,7 +7859,7 @@
           <a:bodyPr wrap="square" lIns="0" tIns="0" rIns="0" bIns="0" rtlCol="0" anchor="ctr"/>
           <a:lstStyle/>
           <a:p>
-            <a:pPr algn="ctr" indent="0" marL="0">
+            <a:pPr marL="0" indent="0" algn="ctr">
               <a:buNone/>
             </a:pPr>
             <a:r>
@@ -8153,7 +7898,7 @@
           <a:bodyPr wrap="square" lIns="0" tIns="0" rIns="0" bIns="0" rtlCol="0" anchor="ctr"/>
           <a:lstStyle/>
           <a:p>
-            <a:pPr indent="0" marL="0">
+            <a:pPr marL="0" indent="0">
               <a:buNone/>
             </a:pPr>
             <a:r>
@@ -8189,7 +7934,7 @@
           <a:bodyPr wrap="square" lIns="0" tIns="0" rIns="0" bIns="0" rtlCol="0" anchor="t"/>
           <a:lstStyle/>
           <a:p>
-            <a:pPr indent="0" marL="0">
+            <a:pPr marL="0" indent="0">
               <a:buNone/>
             </a:pPr>
             <a:r>
@@ -8277,7 +8022,7 @@
           <a:bodyPr wrap="square" lIns="0" tIns="0" rIns="0" bIns="0" rtlCol="0" anchor="ctr"/>
           <a:lstStyle/>
           <a:p>
-            <a:pPr algn="ctr" indent="0" marL="0">
+            <a:pPr marL="0" indent="0" algn="ctr">
               <a:buNone/>
             </a:pPr>
             <a:r>
@@ -8316,7 +8061,7 @@
           <a:bodyPr wrap="square" lIns="0" tIns="0" rIns="0" bIns="0" rtlCol="0" anchor="ctr"/>
           <a:lstStyle/>
           <a:p>
-            <a:pPr indent="0" marL="0">
+            <a:pPr marL="0" indent="0">
               <a:buNone/>
             </a:pPr>
             <a:r>
@@ -8352,7 +8097,7 @@
           <a:bodyPr wrap="square" lIns="0" tIns="0" rIns="0" bIns="0" rtlCol="0" anchor="t"/>
           <a:lstStyle/>
           <a:p>
-            <a:pPr indent="0" marL="0">
+            <a:pPr marL="0" indent="0">
               <a:buNone/>
             </a:pPr>
             <a:r>
@@ -8369,7 +8114,7 @@
       </p:sp>
       <p:sp>
         <p:nvSpPr>
-          <p:cNvPr id="25" name="Slide Number Placeholder 0"/>
+          <p:cNvPr id="3" name="Slide Number Placeholder 0"/>
           <p:cNvSpPr>
             <a:spLocks noGrp="1"/>
           </p:cNvSpPr>
@@ -8387,7 +8132,7 @@
           </a:prstGeom>
           <a:extLst>
             <a:ext uri="{C572A759-6A51-4108-AA02-DFA0A04FC94B}">
-              <ma14:wrappingTextBoxFlag xmlns:ma14="http://schemas.microsoft.com/office/mac/drawingml/2011/main" val="0"/>
+              <ma14:wrappingTextBoxFlag xmlns:ma14="http://schemas.microsoft.com/office/mac/drawingml/2011/main" xmlns="" val="0"/>
             </a:ext>
           </a:extLst>
         </p:spPr>
@@ -8408,7 +8153,7 @@
           <a:p>
             <a:pPr algn="r"/>
             <a:fld id="{F7021451-1387-4CA6-816F-3879F97B5CBC}" type="slidenum">
-              <a:rPr b="0" lang="en-US"/>
+              <a:rPr lang="en-US" b="0"/>
               <a:t>3</a:t>
             </a:fld>
             <a:endParaRPr lang="en-US"/>
@@ -8443,9 +8188,11 @@
       <p:sp>
         <p:nvSpPr>
           <p:cNvPr id="2" name="Text 0"/>
-          <p:cNvSpPr/>
+          <p:cNvSpPr>
+            <a:spLocks noGrp="1"/>
+          </p:cNvSpPr>
           <p:nvPr>
-            <p:ph idx="100" type="title" hasCustomPrompt="1"/>
+            <p:ph type="title" idx="100" hasCustomPrompt="1"/>
           </p:nvPr>
         </p:nvSpPr>
         <p:spPr>
@@ -8463,7 +8210,7 @@
           <a:bodyPr wrap="square" lIns="0" tIns="0" rIns="0" bIns="0" rtlCol="0" anchor="ctr"/>
           <a:lstStyle/>
           <a:p>
-            <a:pPr algn="l" indent="0" marL="0">
+            <a:pPr marL="0" indent="0" algn="l">
               <a:buNone/>
             </a:pPr>
             <a:r>
@@ -8529,7 +8276,7 @@
           <a:bodyPr wrap="square" lIns="0" tIns="0" rIns="0" bIns="0" rtlCol="0" anchor="b"/>
           <a:lstStyle/>
           <a:p>
-            <a:pPr indent="0" marL="0">
+            <a:pPr marL="0" indent="0">
               <a:buNone/>
             </a:pPr>
             <a:r>
@@ -8568,7 +8315,7 @@
           <a:bodyPr wrap="square" lIns="0" tIns="0" rIns="0" bIns="0" rtlCol="0" anchor="t"/>
           <a:lstStyle/>
           <a:p>
-            <a:pPr indent="0" marL="0">
+            <a:pPr marL="0" indent="0">
               <a:buNone/>
             </a:pPr>
             <a:r>
@@ -8631,7 +8378,7 @@
           <a:bodyPr wrap="square" lIns="0" tIns="0" rIns="0" bIns="0" rtlCol="0" anchor="b"/>
           <a:lstStyle/>
           <a:p>
-            <a:pPr indent="0" marL="0">
+            <a:pPr marL="0" indent="0">
               <a:buNone/>
             </a:pPr>
             <a:r>
@@ -8670,7 +8417,7 @@
           <a:bodyPr wrap="square" lIns="0" tIns="0" rIns="0" bIns="0" rtlCol="0" anchor="t"/>
           <a:lstStyle/>
           <a:p>
-            <a:pPr indent="0" marL="0">
+            <a:pPr marL="0" indent="0">
               <a:buNone/>
             </a:pPr>
             <a:r>
@@ -8733,7 +8480,7 @@
           <a:bodyPr wrap="square" lIns="0" tIns="0" rIns="0" bIns="0" rtlCol="0" anchor="b"/>
           <a:lstStyle/>
           <a:p>
-            <a:pPr indent="0" marL="0">
+            <a:pPr marL="0" indent="0">
               <a:buNone/>
             </a:pPr>
             <a:r>
@@ -8772,7 +8519,7 @@
           <a:bodyPr wrap="square" lIns="0" tIns="0" rIns="0" bIns="0" rtlCol="0" anchor="t"/>
           <a:lstStyle/>
           <a:p>
-            <a:pPr indent="0" marL="0">
+            <a:pPr marL="0" indent="0">
               <a:buNone/>
             </a:pPr>
             <a:r>
@@ -8835,7 +8582,7 @@
           <a:bodyPr wrap="square" lIns="0" tIns="0" rIns="0" bIns="0" rtlCol="0" anchor="b"/>
           <a:lstStyle/>
           <a:p>
-            <a:pPr indent="0" marL="0">
+            <a:pPr marL="0" indent="0">
               <a:buNone/>
             </a:pPr>
             <a:r>
@@ -8874,7 +8621,7 @@
           <a:bodyPr wrap="square" lIns="0" tIns="0" rIns="0" bIns="0" rtlCol="0" anchor="t"/>
           <a:lstStyle/>
           <a:p>
-            <a:pPr indent="0" marL="0">
+            <a:pPr marL="0" indent="0">
               <a:buNone/>
             </a:pPr>
             <a:r>
@@ -8937,7 +8684,7 @@
           <a:bodyPr wrap="square" lIns="0" tIns="0" rIns="0" bIns="0" rtlCol="0" anchor="b"/>
           <a:lstStyle/>
           <a:p>
-            <a:pPr indent="0" marL="0">
+            <a:pPr marL="0" indent="0">
               <a:buNone/>
             </a:pPr>
             <a:r>
@@ -8976,7 +8723,7 @@
           <a:bodyPr wrap="square" lIns="0" tIns="0" rIns="0" bIns="0" rtlCol="0" anchor="t"/>
           <a:lstStyle/>
           <a:p>
-            <a:pPr indent="0" marL="0">
+            <a:pPr marL="0" indent="0">
               <a:buNone/>
             </a:pPr>
             <a:r>
@@ -9039,7 +8786,7 @@
           <a:bodyPr wrap="square" lIns="0" tIns="0" rIns="0" bIns="0" rtlCol="0" anchor="b"/>
           <a:lstStyle/>
           <a:p>
-            <a:pPr indent="0" marL="0">
+            <a:pPr marL="0" indent="0">
               <a:buNone/>
             </a:pPr>
             <a:r>
@@ -9078,7 +8825,7 @@
           <a:bodyPr wrap="square" lIns="0" tIns="0" rIns="0" bIns="0" rtlCol="0" anchor="t"/>
           <a:lstStyle/>
           <a:p>
-            <a:pPr indent="0" marL="0">
+            <a:pPr marL="0" indent="0">
               <a:buNone/>
             </a:pPr>
             <a:r>
@@ -9113,7 +8860,7 @@
           </a:prstGeom>
           <a:extLst>
             <a:ext uri="{C572A759-6A51-4108-AA02-DFA0A04FC94B}">
-              <ma14:wrappingTextBoxFlag xmlns:ma14="http://schemas.microsoft.com/office/mac/drawingml/2011/main" val="0"/>
+              <ma14:wrappingTextBoxFlag xmlns:ma14="http://schemas.microsoft.com/office/mac/drawingml/2011/main" xmlns="" val="0"/>
             </a:ext>
           </a:extLst>
         </p:spPr>
@@ -9134,7 +8881,7 @@
           <a:p>
             <a:pPr algn="r"/>
             <a:fld id="{F7021451-1387-4CA6-816F-3879F97B5CBC}" type="slidenum">
-              <a:rPr b="0" lang="en-US"/>
+              <a:rPr lang="en-US" b="0"/>
               <a:t>4</a:t>
             </a:fld>
             <a:endParaRPr lang="en-US"/>
@@ -9169,9 +8916,11 @@
       <p:sp>
         <p:nvSpPr>
           <p:cNvPr id="2" name="Text 0"/>
-          <p:cNvSpPr/>
+          <p:cNvSpPr>
+            <a:spLocks noGrp="1"/>
+          </p:cNvSpPr>
           <p:nvPr>
-            <p:ph idx="100" type="title" hasCustomPrompt="1"/>
+            <p:ph type="title" idx="100" hasCustomPrompt="1"/>
           </p:nvPr>
         </p:nvSpPr>
         <p:spPr>
@@ -9189,7 +8938,7 @@
           <a:bodyPr wrap="square" lIns="0" tIns="0" rIns="0" bIns="0" rtlCol="0" anchor="ctr"/>
           <a:lstStyle/>
           <a:p>
-            <a:pPr algn="l" indent="0" marL="0">
+            <a:pPr marL="0" indent="0" algn="l">
               <a:buNone/>
             </a:pPr>
             <a:r>
@@ -9209,7 +8958,7 @@
       </p:sp>
       <p:graphicFrame>
         <p:nvGraphicFramePr>
-          <p:cNvPr id="4" name="chart_62" descr=""/>
+          <p:cNvPr id="4" name="chart_62"/>
           <p:cNvGraphicFramePr/>
           <p:nvPr/>
         </p:nvGraphicFramePr>
@@ -9217,9 +8966,9 @@
           <a:off x="457200" y="1143000"/>
           <a:ext cx="5120640" cy="3429000"/>
         </p:xfrm>
-        <a:graphic xmlns:a="http://schemas.openxmlformats.org/drawingml/2006/main">
+        <a:graphic>
           <a:graphicData uri="http://schemas.openxmlformats.org/drawingml/2006/chart">
-            <c:chart xmlns:c="http://schemas.openxmlformats.org/drawingml/2006/chart" r:id="rId1"/>
+            <c:chart xmlns:c="http://schemas.openxmlformats.org/drawingml/2006/chart" xmlns:r="http://schemas.openxmlformats.org/officeDocument/2006/relationships" r:id="rId3"/>
           </a:graphicData>
         </a:graphic>
       </p:graphicFrame>
@@ -9271,7 +9020,7 @@
           <a:bodyPr wrap="square" lIns="0" tIns="0" rIns="0" bIns="0" rtlCol="0" anchor="b"/>
           <a:lstStyle/>
           <a:p>
-            <a:pPr indent="0" marL="0">
+            <a:pPr marL="0" indent="0">
               <a:buNone/>
             </a:pPr>
             <a:r>
@@ -9310,7 +9059,7 @@
           <a:bodyPr wrap="square" lIns="0" tIns="0" rIns="0" bIns="0" rtlCol="0" anchor="t"/>
           <a:lstStyle/>
           <a:p>
-            <a:pPr indent="0" marL="0">
+            <a:pPr marL="0" indent="0">
               <a:buNone/>
             </a:pPr>
             <a:r>
@@ -9403,7 +9152,7 @@
           </a:prstGeom>
           <a:extLst>
             <a:ext uri="{C572A759-6A51-4108-AA02-DFA0A04FC94B}">
-              <ma14:wrappingTextBoxFlag xmlns:ma14="http://schemas.microsoft.com/office/mac/drawingml/2011/main" val="0"/>
+              <ma14:wrappingTextBoxFlag xmlns:ma14="http://schemas.microsoft.com/office/mac/drawingml/2011/main" xmlns="" val="0"/>
             </a:ext>
           </a:extLst>
         </p:spPr>
@@ -9424,7 +9173,7 @@
           <a:p>
             <a:pPr algn="r"/>
             <a:fld id="{F7021451-1387-4CA6-816F-3879F97B5CBC}" type="slidenum">
-              <a:rPr b="0" lang="en-US"/>
+              <a:rPr lang="en-US" b="0"/>
               <a:t>5</a:t>
             </a:fld>
             <a:endParaRPr lang="en-US"/>
@@ -9459,9 +9208,11 @@
       <p:sp>
         <p:nvSpPr>
           <p:cNvPr id="2" name="Text 0"/>
-          <p:cNvSpPr/>
+          <p:cNvSpPr>
+            <a:spLocks noGrp="1"/>
+          </p:cNvSpPr>
           <p:nvPr>
-            <p:ph idx="100" type="title" hasCustomPrompt="1"/>
+            <p:ph type="title" idx="100" hasCustomPrompt="1"/>
           </p:nvPr>
         </p:nvSpPr>
         <p:spPr>
@@ -9479,7 +9230,7 @@
           <a:bodyPr wrap="square" lIns="0" tIns="0" rIns="0" bIns="0" rtlCol="0" anchor="ctr"/>
           <a:lstStyle/>
           <a:p>
-            <a:pPr algn="l" indent="0" marL="0">
+            <a:pPr marL="0" indent="0" algn="l">
               <a:buNone/>
             </a:pPr>
             <a:r>
@@ -9499,7 +9250,7 @@
       </p:sp>
       <p:graphicFrame>
         <p:nvGraphicFramePr>
-          <p:cNvPr id="4" name="chart_67" descr=""/>
+          <p:cNvPr id="4" name="chart_67"/>
           <p:cNvGraphicFramePr/>
           <p:nvPr/>
         </p:nvGraphicFramePr>
@@ -9507,9 +9258,9 @@
           <a:off x="457200" y="1143000"/>
           <a:ext cx="5577840" cy="3429000"/>
         </p:xfrm>
-        <a:graphic xmlns:a="http://schemas.openxmlformats.org/drawingml/2006/main">
+        <a:graphic>
           <a:graphicData uri="http://schemas.openxmlformats.org/drawingml/2006/chart">
-            <c:chart xmlns:c="http://schemas.openxmlformats.org/drawingml/2006/chart" r:id="rId1"/>
+            <c:chart xmlns:c="http://schemas.openxmlformats.org/drawingml/2006/chart" xmlns:r="http://schemas.openxmlformats.org/officeDocument/2006/relationships" r:id="rId3"/>
           </a:graphicData>
         </a:graphic>
       </p:graphicFrame>
@@ -9561,7 +9312,7 @@
           <a:bodyPr wrap="square" lIns="0" tIns="0" rIns="0" bIns="0" rtlCol="0" anchor="b"/>
           <a:lstStyle/>
           <a:p>
-            <a:pPr indent="0" marL="0">
+            <a:pPr marL="0" indent="0">
               <a:buNone/>
             </a:pPr>
             <a:r>
@@ -9600,7 +9351,7 @@
           <a:bodyPr wrap="square" lIns="0" tIns="0" rIns="0" bIns="0" rtlCol="0" anchor="t"/>
           <a:lstStyle/>
           <a:p>
-            <a:pPr indent="0" marL="0">
+            <a:pPr marL="0" indent="0">
               <a:buNone/>
             </a:pPr>
             <a:r>
@@ -9636,7 +9387,7 @@
           <a:bodyPr wrap="square" lIns="0" tIns="0" rIns="0" bIns="0" rtlCol="0" anchor="b"/>
           <a:lstStyle/>
           <a:p>
-            <a:pPr indent="0" marL="0">
+            <a:pPr marL="0" indent="0">
               <a:buNone/>
             </a:pPr>
             <a:r>
@@ -9675,7 +9426,7 @@
           <a:bodyPr wrap="square" lIns="0" tIns="0" rIns="0" bIns="0" rtlCol="0" anchor="t"/>
           <a:lstStyle/>
           <a:p>
-            <a:pPr indent="0" marL="0">
+            <a:pPr marL="0" indent="0">
               <a:buNone/>
             </a:pPr>
             <a:r>
@@ -9710,7 +9461,7 @@
           </a:prstGeom>
           <a:extLst>
             <a:ext uri="{C572A759-6A51-4108-AA02-DFA0A04FC94B}">
-              <ma14:wrappingTextBoxFlag xmlns:ma14="http://schemas.microsoft.com/office/mac/drawingml/2011/main" val="0"/>
+              <ma14:wrappingTextBoxFlag xmlns:ma14="http://schemas.microsoft.com/office/mac/drawingml/2011/main" xmlns="" val="0"/>
             </a:ext>
           </a:extLst>
         </p:spPr>
@@ -9731,7 +9482,7 @@
           <a:p>
             <a:pPr algn="r"/>
             <a:fld id="{F7021451-1387-4CA6-816F-3879F97B5CBC}" type="slidenum">
-              <a:rPr b="0" lang="en-US"/>
+              <a:rPr lang="en-US" b="0"/>
               <a:t>6</a:t>
             </a:fld>
             <a:endParaRPr lang="en-US"/>
@@ -9766,9 +9517,11 @@
       <p:sp>
         <p:nvSpPr>
           <p:cNvPr id="2" name="Text 0"/>
-          <p:cNvSpPr/>
+          <p:cNvSpPr>
+            <a:spLocks noGrp="1"/>
+          </p:cNvSpPr>
           <p:nvPr>
-            <p:ph idx="100" type="title" hasCustomPrompt="1"/>
+            <p:ph type="title" idx="100" hasCustomPrompt="1"/>
           </p:nvPr>
         </p:nvSpPr>
         <p:spPr>
@@ -9786,7 +9539,7 @@
           <a:bodyPr wrap="square" lIns="0" tIns="0" rIns="0" bIns="0" rtlCol="0" anchor="ctr"/>
           <a:lstStyle/>
           <a:p>
-            <a:pPr algn="l" indent="0" marL="0">
+            <a:pPr marL="0" indent="0" algn="l">
               <a:buNone/>
             </a:pPr>
             <a:r>
@@ -9806,7 +9559,7 @@
       </p:sp>
       <p:graphicFrame>
         <p:nvGraphicFramePr>
-          <p:cNvPr id="4" name="chart_73" descr=""/>
+          <p:cNvPr id="4" name="chart_73"/>
           <p:cNvGraphicFramePr/>
           <p:nvPr/>
         </p:nvGraphicFramePr>
@@ -9814,9 +9567,9 @@
           <a:off x="457200" y="1143000"/>
           <a:ext cx="4937760" cy="3429000"/>
         </p:xfrm>
-        <a:graphic xmlns:a="http://schemas.openxmlformats.org/drawingml/2006/main">
+        <a:graphic>
           <a:graphicData uri="http://schemas.openxmlformats.org/drawingml/2006/chart">
-            <c:chart xmlns:c="http://schemas.openxmlformats.org/drawingml/2006/chart" r:id="rId1"/>
+            <c:chart xmlns:c="http://schemas.openxmlformats.org/drawingml/2006/chart" xmlns:r="http://schemas.openxmlformats.org/officeDocument/2006/relationships" r:id="rId3"/>
           </a:graphicData>
         </a:graphic>
       </p:graphicFrame>
@@ -9868,7 +9621,7 @@
           <a:bodyPr wrap="square" lIns="0" tIns="0" rIns="0" bIns="0" rtlCol="0" anchor="ctr"/>
           <a:lstStyle/>
           <a:p>
-            <a:pPr indent="0" marL="0">
+            <a:pPr marL="0" indent="0">
               <a:buNone/>
             </a:pPr>
             <a:r>
@@ -9904,7 +9657,7 @@
           <a:bodyPr wrap="square" lIns="0" tIns="0" rIns="0" bIns="0" rtlCol="0" anchor="ctr"/>
           <a:lstStyle/>
           <a:p>
-            <a:pPr indent="0" marL="0">
+            <a:pPr marL="0" indent="0">
               <a:buNone/>
             </a:pPr>
             <a:r>
@@ -9940,7 +9693,7 @@
           <a:bodyPr wrap="square" lIns="0" tIns="0" rIns="0" bIns="0" rtlCol="0" anchor="ctr"/>
           <a:lstStyle/>
           <a:p>
-            <a:pPr algn="r" indent="0" marL="0">
+            <a:pPr marL="0" indent="0" algn="r">
               <a:buNone/>
             </a:pPr>
             <a:r>
@@ -9976,7 +9729,7 @@
           <a:bodyPr wrap="square" lIns="0" tIns="0" rIns="0" bIns="0" rtlCol="0" anchor="ctr"/>
           <a:lstStyle/>
           <a:p>
-            <a:pPr indent="0" marL="0">
+            <a:pPr marL="0" indent="0">
               <a:buNone/>
             </a:pPr>
             <a:r>
@@ -10012,7 +9765,7 @@
           <a:bodyPr wrap="square" lIns="0" tIns="0" rIns="0" bIns="0" rtlCol="0" anchor="ctr"/>
           <a:lstStyle/>
           <a:p>
-            <a:pPr algn="r" indent="0" marL="0">
+            <a:pPr marL="0" indent="0" algn="r">
               <a:buNone/>
             </a:pPr>
             <a:r>
@@ -10048,7 +9801,7 @@
           <a:bodyPr wrap="square" lIns="0" tIns="0" rIns="0" bIns="0" rtlCol="0" anchor="ctr"/>
           <a:lstStyle/>
           <a:p>
-            <a:pPr indent="0" marL="0">
+            <a:pPr marL="0" indent="0">
               <a:buNone/>
             </a:pPr>
             <a:r>
@@ -10084,7 +9837,7 @@
           <a:bodyPr wrap="square" lIns="0" tIns="0" rIns="0" bIns="0" rtlCol="0" anchor="ctr"/>
           <a:lstStyle/>
           <a:p>
-            <a:pPr algn="r" indent="0" marL="0">
+            <a:pPr marL="0" indent="0" algn="r">
               <a:buNone/>
             </a:pPr>
             <a:r>
@@ -10120,7 +9873,7 @@
           <a:bodyPr wrap="square" lIns="0" tIns="0" rIns="0" bIns="0" rtlCol="0" anchor="ctr"/>
           <a:lstStyle/>
           <a:p>
-            <a:pPr indent="0" marL="0">
+            <a:pPr marL="0" indent="0">
               <a:buNone/>
             </a:pPr>
             <a:r>
@@ -10156,7 +9909,7 @@
           <a:bodyPr wrap="square" lIns="0" tIns="0" rIns="0" bIns="0" rtlCol="0" anchor="ctr"/>
           <a:lstStyle/>
           <a:p>
-            <a:pPr algn="r" indent="0" marL="0">
+            <a:pPr marL="0" indent="0" algn="r">
               <a:buNone/>
             </a:pPr>
             <a:r>
@@ -10192,7 +9945,7 @@
           <a:bodyPr wrap="square" lIns="0" tIns="0" rIns="0" bIns="0" rtlCol="0" anchor="ctr"/>
           <a:lstStyle/>
           <a:p>
-            <a:pPr indent="0" marL="0">
+            <a:pPr marL="0" indent="0">
               <a:buNone/>
             </a:pPr>
             <a:r>
@@ -10228,7 +9981,7 @@
           <a:bodyPr wrap="square" lIns="0" tIns="0" rIns="0" bIns="0" rtlCol="0" anchor="ctr"/>
           <a:lstStyle/>
           <a:p>
-            <a:pPr algn="r" indent="0" marL="0">
+            <a:pPr marL="0" indent="0" algn="r">
               <a:buNone/>
             </a:pPr>
             <a:r>
@@ -10263,7 +10016,7 @@
           </a:prstGeom>
           <a:extLst>
             <a:ext uri="{C572A759-6A51-4108-AA02-DFA0A04FC94B}">
-              <ma14:wrappingTextBoxFlag xmlns:ma14="http://schemas.microsoft.com/office/mac/drawingml/2011/main" val="0"/>
+              <ma14:wrappingTextBoxFlag xmlns:ma14="http://schemas.microsoft.com/office/mac/drawingml/2011/main" xmlns="" val="0"/>
             </a:ext>
           </a:extLst>
         </p:spPr>
@@ -10284,7 +10037,7 @@
           <a:p>
             <a:pPr algn="r"/>
             <a:fld id="{F7021451-1387-4CA6-816F-3879F97B5CBC}" type="slidenum">
-              <a:rPr b="0" lang="en-US"/>
+              <a:rPr lang="en-US" b="0"/>
               <a:t>7</a:t>
             </a:fld>
             <a:endParaRPr lang="en-US"/>
@@ -10319,9 +10072,11 @@
       <p:sp>
         <p:nvSpPr>
           <p:cNvPr id="2" name="Text 0"/>
-          <p:cNvSpPr/>
+          <p:cNvSpPr>
+            <a:spLocks noGrp="1"/>
+          </p:cNvSpPr>
           <p:nvPr>
-            <p:ph idx="100" type="title" hasCustomPrompt="1"/>
+            <p:ph type="title" idx="100" hasCustomPrompt="1"/>
           </p:nvPr>
         </p:nvSpPr>
         <p:spPr>
@@ -10339,7 +10094,7 @@
           <a:bodyPr wrap="square" lIns="0" tIns="0" rIns="0" bIns="0" rtlCol="0" anchor="ctr"/>
           <a:lstStyle/>
           <a:p>
-            <a:pPr algn="l" indent="0" marL="0">
+            <a:pPr marL="0" indent="0" algn="l">
               <a:buNone/>
             </a:pPr>
             <a:r>
@@ -10359,7 +10114,7 @@
       </p:sp>
       <p:graphicFrame>
         <p:nvGraphicFramePr>
-          <p:cNvPr id="4" name="chart_86" descr=""/>
+          <p:cNvPr id="4" name="chart_86"/>
           <p:cNvGraphicFramePr/>
           <p:nvPr/>
         </p:nvGraphicFramePr>
@@ -10367,9 +10122,9 @@
           <a:off x="457200" y="1143000"/>
           <a:ext cx="4937760" cy="3429000"/>
         </p:xfrm>
-        <a:graphic xmlns:a="http://schemas.openxmlformats.org/drawingml/2006/main">
+        <a:graphic>
           <a:graphicData uri="http://schemas.openxmlformats.org/drawingml/2006/chart">
-            <c:chart xmlns:c="http://schemas.openxmlformats.org/drawingml/2006/chart" r:id="rId1"/>
+            <c:chart xmlns:c="http://schemas.openxmlformats.org/drawingml/2006/chart" xmlns:r="http://schemas.openxmlformats.org/officeDocument/2006/relationships" r:id="rId3"/>
           </a:graphicData>
         </a:graphic>
       </p:graphicFrame>
@@ -10421,7 +10176,7 @@
           <a:bodyPr wrap="square" lIns="0" tIns="0" rIns="0" bIns="0" rtlCol="0" anchor="b"/>
           <a:lstStyle/>
           <a:p>
-            <a:pPr indent="0" marL="0">
+            <a:pPr marL="0" indent="0">
               <a:buNone/>
             </a:pPr>
             <a:r>
@@ -10460,7 +10215,7 @@
           <a:bodyPr wrap="square" lIns="0" tIns="0" rIns="0" bIns="0" rtlCol="0" anchor="t"/>
           <a:lstStyle/>
           <a:p>
-            <a:pPr indent="0" marL="0">
+            <a:pPr marL="0" indent="0">
               <a:buNone/>
             </a:pPr>
             <a:r>
@@ -10523,7 +10278,7 @@
           <a:bodyPr wrap="square" lIns="0" tIns="0" rIns="0" bIns="0" rtlCol="0" anchor="b"/>
           <a:lstStyle/>
           <a:p>
-            <a:pPr indent="0" marL="0">
+            <a:pPr marL="0" indent="0">
               <a:buNone/>
             </a:pPr>
             <a:r>
@@ -10562,7 +10317,7 @@
           <a:bodyPr wrap="square" lIns="0" tIns="0" rIns="0" bIns="0" rtlCol="0" anchor="t"/>
           <a:lstStyle/>
           <a:p>
-            <a:pPr indent="0" marL="0">
+            <a:pPr marL="0" indent="0">
               <a:buNone/>
             </a:pPr>
             <a:r>
@@ -10597,7 +10352,7 @@
           </a:prstGeom>
           <a:extLst>
             <a:ext uri="{C572A759-6A51-4108-AA02-DFA0A04FC94B}">
-              <ma14:wrappingTextBoxFlag xmlns:ma14="http://schemas.microsoft.com/office/mac/drawingml/2011/main" val="0"/>
+              <ma14:wrappingTextBoxFlag xmlns:ma14="http://schemas.microsoft.com/office/mac/drawingml/2011/main" xmlns="" val="0"/>
             </a:ext>
           </a:extLst>
         </p:spPr>
@@ -10618,7 +10373,7 @@
           <a:p>
             <a:pPr algn="r"/>
             <a:fld id="{F7021451-1387-4CA6-816F-3879F97B5CBC}" type="slidenum">
-              <a:rPr b="0" lang="en-US"/>
+              <a:rPr lang="en-US" b="0"/>
               <a:t>8</a:t>
             </a:fld>
             <a:endParaRPr lang="en-US"/>
@@ -10653,9 +10408,11 @@
       <p:sp>
         <p:nvSpPr>
           <p:cNvPr id="2" name="Text 0"/>
-          <p:cNvSpPr/>
+          <p:cNvSpPr>
+            <a:spLocks noGrp="1"/>
+          </p:cNvSpPr>
           <p:nvPr>
-            <p:ph idx="100" type="title" hasCustomPrompt="1"/>
+            <p:ph type="title" idx="100" hasCustomPrompt="1"/>
           </p:nvPr>
         </p:nvSpPr>
         <p:spPr>
@@ -10673,7 +10430,7 @@
           <a:bodyPr wrap="square" lIns="0" tIns="0" rIns="0" bIns="0" rtlCol="0" anchor="ctr"/>
           <a:lstStyle/>
           <a:p>
-            <a:pPr algn="l" indent="0" marL="0">
+            <a:pPr marL="0" indent="0" algn="l">
               <a:buNone/>
             </a:pPr>
             <a:r>
@@ -10712,7 +10469,7 @@
           <a:bodyPr wrap="square" lIns="0" tIns="0" rIns="0" bIns="0" rtlCol="0" anchor="ctr"/>
           <a:lstStyle/>
           <a:p>
-            <a:pPr indent="0" marL="0">
+            <a:pPr marL="0" indent="0">
               <a:buNone/>
             </a:pPr>
             <a:r>
@@ -10775,7 +10532,7 @@
           <a:bodyPr wrap="square" lIns="0" tIns="0" rIns="0" bIns="0" rtlCol="0" anchor="ctr"/>
           <a:lstStyle/>
           <a:p>
-            <a:pPr indent="0" marL="0">
+            <a:pPr marL="0" indent="0">
               <a:buNone/>
             </a:pPr>
             <a:r>
@@ -10811,7 +10568,7 @@
           <a:bodyPr wrap="square" lIns="0" tIns="0" rIns="0" bIns="0" rtlCol="0" anchor="ctr"/>
           <a:lstStyle/>
           <a:p>
-            <a:pPr algn="r" indent="0" marL="0">
+            <a:pPr marL="0" indent="0" algn="r">
               <a:buNone/>
             </a:pPr>
             <a:r>
@@ -10877,7 +10634,7 @@
           <a:bodyPr wrap="square" lIns="0" tIns="0" rIns="0" bIns="0" rtlCol="0" anchor="ctr"/>
           <a:lstStyle/>
           <a:p>
-            <a:pPr indent="0" marL="0">
+            <a:pPr marL="0" indent="0">
               <a:buNone/>
             </a:pPr>
             <a:r>
@@ -10913,7 +10670,7 @@
           <a:bodyPr wrap="square" lIns="0" tIns="0" rIns="0" bIns="0" rtlCol="0" anchor="ctr"/>
           <a:lstStyle/>
           <a:p>
-            <a:pPr algn="r" indent="0" marL="0">
+            <a:pPr marL="0" indent="0" algn="r">
               <a:buNone/>
             </a:pPr>
             <a:r>
@@ -10979,7 +10736,7 @@
           <a:bodyPr wrap="square" lIns="0" tIns="0" rIns="0" bIns="0" rtlCol="0" anchor="ctr"/>
           <a:lstStyle/>
           <a:p>
-            <a:pPr indent="0" marL="0">
+            <a:pPr marL="0" indent="0">
               <a:buNone/>
             </a:pPr>
             <a:r>
@@ -11015,7 +10772,7 @@
           <a:bodyPr wrap="square" lIns="0" tIns="0" rIns="0" bIns="0" rtlCol="0" anchor="ctr"/>
           <a:lstStyle/>
           <a:p>
-            <a:pPr algn="r" indent="0" marL="0">
+            <a:pPr marL="0" indent="0" algn="r">
               <a:buNone/>
             </a:pPr>
             <a:r>
@@ -11035,7 +10792,7 @@
       </p:sp>
       <p:graphicFrame>
         <p:nvGraphicFramePr>
-          <p:cNvPr id="14" name="chart_103" descr=""/>
+          <p:cNvPr id="14" name="chart_103"/>
           <p:cNvGraphicFramePr/>
           <p:nvPr/>
         </p:nvGraphicFramePr>
@@ -11043,9 +10800,9 @@
           <a:off x="4023360" y="1143000"/>
           <a:ext cx="4663440" cy="3474720"/>
         </p:xfrm>
-        <a:graphic xmlns:a="http://schemas.openxmlformats.org/drawingml/2006/main">
+        <a:graphic>
           <a:graphicData uri="http://schemas.openxmlformats.org/drawingml/2006/chart">
-            <c:chart xmlns:c="http://schemas.openxmlformats.org/drawingml/2006/chart" r:id="rId1"/>
+            <c:chart xmlns:c="http://schemas.openxmlformats.org/drawingml/2006/chart" xmlns:r="http://schemas.openxmlformats.org/officeDocument/2006/relationships" r:id="rId3"/>
           </a:graphicData>
         </a:graphic>
       </p:graphicFrame>
@@ -11069,7 +10826,7 @@
           </a:prstGeom>
           <a:extLst>
             <a:ext uri="{C572A759-6A51-4108-AA02-DFA0A04FC94B}">
-              <ma14:wrappingTextBoxFlag xmlns:ma14="http://schemas.microsoft.com/office/mac/drawingml/2011/main" val="0"/>
+              <ma14:wrappingTextBoxFlag xmlns:ma14="http://schemas.microsoft.com/office/mac/drawingml/2011/main" xmlns="" val="0"/>
             </a:ext>
           </a:extLst>
         </p:spPr>
@@ -11090,7 +10847,7 @@
           <a:p>
             <a:pPr algn="r"/>
             <a:fld id="{F7021451-1387-4CA6-816F-3879F97B5CBC}" type="slidenum">
-              <a:rPr b="0" lang="en-US"/>
+              <a:rPr lang="en-US" b="0"/>
               <a:t>9</a:t>
             </a:fld>
             <a:endParaRPr lang="en-US"/>
@@ -11398,4 +11155,299 @@
     </a:ext>
   </a:extLst>
 </a:theme>
+</file>
+
+<file path=ppt/theme/theme2.xml><?xml version="1.0" encoding="utf-8"?>
+<a:theme xmlns:a="http://schemas.openxmlformats.org/drawingml/2006/main" name="Office Theme">
+  <a:themeElements>
+    <a:clrScheme name="Office">
+      <a:dk1>
+        <a:sysClr val="windowText" lastClr="000000"/>
+      </a:dk1>
+      <a:lt1>
+        <a:sysClr val="window" lastClr="FFFFFF"/>
+      </a:lt1>
+      <a:dk2>
+        <a:srgbClr val="44546A"/>
+      </a:dk2>
+      <a:lt2>
+        <a:srgbClr val="E7E6E6"/>
+      </a:lt2>
+      <a:accent1>
+        <a:srgbClr val="4472C4"/>
+      </a:accent1>
+      <a:accent2>
+        <a:srgbClr val="ED7D31"/>
+      </a:accent2>
+      <a:accent3>
+        <a:srgbClr val="A5A5A5"/>
+      </a:accent3>
+      <a:accent4>
+        <a:srgbClr val="FFC000"/>
+      </a:accent4>
+      <a:accent5>
+        <a:srgbClr val="5B9BD5"/>
+      </a:accent5>
+      <a:accent6>
+        <a:srgbClr val="70AD47"/>
+      </a:accent6>
+      <a:hlink>
+        <a:srgbClr val="0563C1"/>
+      </a:hlink>
+      <a:folHlink>
+        <a:srgbClr val="954F72"/>
+      </a:folHlink>
+    </a:clrScheme>
+    <a:fontScheme name="Office">
+      <a:majorFont>
+        <a:latin typeface="Calibri Light" panose="020F0302020204030204"/>
+        <a:ea typeface=""/>
+        <a:cs typeface=""/>
+        <a:font script="Jpan" typeface="游ゴシック Light"/>
+        <a:font script="Hang" typeface="맑은 고딕"/>
+        <a:font script="Hans" typeface="等线 Light"/>
+        <a:font script="Hant" typeface="新細明體"/>
+        <a:font script="Arab" typeface="Times New Roman"/>
+        <a:font script="Hebr" typeface="Times New Roman"/>
+        <a:font script="Thai" typeface="Angsana New"/>
+        <a:font script="Ethi" typeface="Nyala"/>
+        <a:font script="Beng" typeface="Vrinda"/>
+        <a:font script="Gujr" typeface="Shruti"/>
+        <a:font script="Khmr" typeface="MoolBoran"/>
+        <a:font script="Knda" typeface="Tunga"/>
+        <a:font script="Guru" typeface="Raavi"/>
+        <a:font script="Cans" typeface="Euphemia"/>
+        <a:font script="Cher" typeface="Plantagenet Cherokee"/>
+        <a:font script="Yiii" typeface="Microsoft Yi Baiti"/>
+        <a:font script="Tibt" typeface="Microsoft Himalaya"/>
+        <a:font script="Thaa" typeface="MV Boli"/>
+        <a:font script="Deva" typeface="Mangal"/>
+        <a:font script="Telu" typeface="Gautami"/>
+        <a:font script="Taml" typeface="Latha"/>
+        <a:font script="Syrc" typeface="Estrangelo Edessa"/>
+        <a:font script="Orya" typeface="Kalinga"/>
+        <a:font script="Mlym" typeface="Kartika"/>
+        <a:font script="Laoo" typeface="DokChampa"/>
+        <a:font script="Sinh" typeface="Iskoola Pota"/>
+        <a:font script="Mong" typeface="Mongolian Baiti"/>
+        <a:font script="Viet" typeface="Times New Roman"/>
+        <a:font script="Uigh" typeface="Microsoft Uighur"/>
+        <a:font script="Geor" typeface="Sylfaen"/>
+        <a:font script="Armn" typeface="Arial"/>
+        <a:font script="Bugi" typeface="Leelawadee UI"/>
+        <a:font script="Bopo" typeface="Microsoft JhengHei"/>
+        <a:font script="Java" typeface="Javanese Text"/>
+        <a:font script="Lisu" typeface="Segoe UI"/>
+        <a:font script="Mymr" typeface="Myanmar Text"/>
+        <a:font script="Nkoo" typeface="Ebrima"/>
+        <a:font script="Olck" typeface="Nirmala UI"/>
+        <a:font script="Osma" typeface="Ebrima"/>
+        <a:font script="Phag" typeface="Phagspa"/>
+        <a:font script="Syrn" typeface="Estrangelo Edessa"/>
+        <a:font script="Syrj" typeface="Estrangelo Edessa"/>
+        <a:font script="Syre" typeface="Estrangelo Edessa"/>
+        <a:font script="Sora" typeface="Nirmala UI"/>
+        <a:font script="Tale" typeface="Microsoft Tai Le"/>
+        <a:font script="Talu" typeface="Microsoft New Tai Lue"/>
+        <a:font script="Tfng" typeface="Ebrima"/>
+      </a:majorFont>
+      <a:minorFont>
+        <a:latin typeface="Calibri" panose="020F0502020204030204"/>
+        <a:ea typeface=""/>
+        <a:cs typeface=""/>
+        <a:font script="Jpan" typeface="游ゴシック"/>
+        <a:font script="Hang" typeface="맑은 고딕"/>
+        <a:font script="Hans" typeface="等线"/>
+        <a:font script="Hant" typeface="新細明體"/>
+        <a:font script="Arab" typeface="Arial"/>
+        <a:font script="Hebr" typeface="Arial"/>
+        <a:font script="Thai" typeface="Cordia New"/>
+        <a:font script="Ethi" typeface="Nyala"/>
+        <a:font script="Beng" typeface="Vrinda"/>
+        <a:font script="Gujr" typeface="Shruti"/>
+        <a:font script="Khmr" typeface="DaunPenh"/>
+        <a:font script="Knda" typeface="Tunga"/>
+        <a:font script="Guru" typeface="Raavi"/>
+        <a:font script="Cans" typeface="Euphemia"/>
+        <a:font script="Cher" typeface="Plantagenet Cherokee"/>
+        <a:font script="Yiii" typeface="Microsoft Yi Baiti"/>
+        <a:font script="Tibt" typeface="Microsoft Himalaya"/>
+        <a:font script="Thaa" typeface="MV Boli"/>
+        <a:font script="Deva" typeface="Mangal"/>
+        <a:font script="Telu" typeface="Gautami"/>
+        <a:font script="Taml" typeface="Latha"/>
+        <a:font script="Syrc" typeface="Estrangelo Edessa"/>
+        <a:font script="Orya" typeface="Kalinga"/>
+        <a:font script="Mlym" typeface="Kartika"/>
+        <a:font script="Laoo" typeface="DokChampa"/>
+        <a:font script="Sinh" typeface="Iskoola Pota"/>
+        <a:font script="Mong" typeface="Mongolian Baiti"/>
+        <a:font script="Viet" typeface="Arial"/>
+        <a:font script="Uigh" typeface="Microsoft Uighur"/>
+        <a:font script="Geor" typeface="Sylfaen"/>
+        <a:font script="Armn" typeface="Arial"/>
+        <a:font script="Bugi" typeface="Leelawadee UI"/>
+        <a:font script="Bopo" typeface="Microsoft JhengHei"/>
+        <a:font script="Java" typeface="Javanese Text"/>
+        <a:font script="Lisu" typeface="Segoe UI"/>
+        <a:font script="Mymr" typeface="Myanmar Text"/>
+        <a:font script="Nkoo" typeface="Ebrima"/>
+        <a:font script="Olck" typeface="Nirmala UI"/>
+        <a:font script="Osma" typeface="Ebrima"/>
+        <a:font script="Phag" typeface="Phagspa"/>
+        <a:font script="Syrn" typeface="Estrangelo Edessa"/>
+        <a:font script="Syrj" typeface="Estrangelo Edessa"/>
+        <a:font script="Syre" typeface="Estrangelo Edessa"/>
+        <a:font script="Sora" typeface="Nirmala UI"/>
+        <a:font script="Tale" typeface="Microsoft Tai Le"/>
+        <a:font script="Talu" typeface="Microsoft New Tai Lue"/>
+        <a:font script="Tfng" typeface="Ebrima"/>
+      </a:minorFont>
+    </a:fontScheme>
+    <a:fmtScheme name="Office">
+      <a:fillStyleLst>
+        <a:solidFill>
+          <a:schemeClr val="phClr"/>
+        </a:solidFill>
+        <a:gradFill rotWithShape="1">
+          <a:gsLst>
+            <a:gs pos="0">
+              <a:schemeClr val="phClr">
+                <a:lumMod val="110000"/>
+                <a:satMod val="105000"/>
+                <a:tint val="67000"/>
+              </a:schemeClr>
+            </a:gs>
+            <a:gs pos="50000">
+              <a:schemeClr val="phClr">
+                <a:lumMod val="105000"/>
+                <a:satMod val="103000"/>
+                <a:tint val="73000"/>
+              </a:schemeClr>
+            </a:gs>
+            <a:gs pos="100000">
+              <a:schemeClr val="phClr">
+                <a:lumMod val="105000"/>
+                <a:satMod val="109000"/>
+                <a:tint val="81000"/>
+              </a:schemeClr>
+            </a:gs>
+          </a:gsLst>
+          <a:lin ang="5400000" scaled="0"/>
+        </a:gradFill>
+        <a:gradFill rotWithShape="1">
+          <a:gsLst>
+            <a:gs pos="0">
+              <a:schemeClr val="phClr">
+                <a:satMod val="103000"/>
+                <a:lumMod val="102000"/>
+                <a:tint val="94000"/>
+              </a:schemeClr>
+            </a:gs>
+            <a:gs pos="50000">
+              <a:schemeClr val="phClr">
+                <a:satMod val="110000"/>
+                <a:lumMod val="100000"/>
+                <a:shade val="100000"/>
+              </a:schemeClr>
+            </a:gs>
+            <a:gs pos="100000">
+              <a:schemeClr val="phClr">
+                <a:lumMod val="99000"/>
+                <a:satMod val="120000"/>
+                <a:shade val="78000"/>
+              </a:schemeClr>
+            </a:gs>
+          </a:gsLst>
+          <a:lin ang="5400000" scaled="0"/>
+        </a:gradFill>
+      </a:fillStyleLst>
+      <a:lnStyleLst>
+        <a:ln w="6350" cap="flat" cmpd="sng" algn="ctr">
+          <a:solidFill>
+            <a:schemeClr val="phClr"/>
+          </a:solidFill>
+          <a:prstDash val="solid"/>
+          <a:miter lim="800000"/>
+        </a:ln>
+        <a:ln w="12700" cap="flat" cmpd="sng" algn="ctr">
+          <a:solidFill>
+            <a:schemeClr val="phClr"/>
+          </a:solidFill>
+          <a:prstDash val="solid"/>
+          <a:miter lim="800000"/>
+        </a:ln>
+        <a:ln w="19050" cap="flat" cmpd="sng" algn="ctr">
+          <a:solidFill>
+            <a:schemeClr val="phClr"/>
+          </a:solidFill>
+          <a:prstDash val="solid"/>
+          <a:miter lim="800000"/>
+        </a:ln>
+      </a:lnStyleLst>
+      <a:effectStyleLst>
+        <a:effectStyle>
+          <a:effectLst/>
+        </a:effectStyle>
+        <a:effectStyle>
+          <a:effectLst/>
+        </a:effectStyle>
+        <a:effectStyle>
+          <a:effectLst>
+            <a:outerShdw blurRad="57150" dist="19050" dir="5400000" algn="ctr" rotWithShape="0">
+              <a:srgbClr val="000000">
+                <a:alpha val="63000"/>
+              </a:srgbClr>
+            </a:outerShdw>
+          </a:effectLst>
+        </a:effectStyle>
+      </a:effectStyleLst>
+      <a:bgFillStyleLst>
+        <a:solidFill>
+          <a:schemeClr val="phClr"/>
+        </a:solidFill>
+        <a:solidFill>
+          <a:schemeClr val="phClr">
+            <a:tint val="95000"/>
+            <a:satMod val="170000"/>
+          </a:schemeClr>
+        </a:solidFill>
+        <a:gradFill rotWithShape="1">
+          <a:gsLst>
+            <a:gs pos="0">
+              <a:schemeClr val="phClr">
+                <a:tint val="93000"/>
+                <a:satMod val="150000"/>
+                <a:shade val="98000"/>
+                <a:lumMod val="102000"/>
+              </a:schemeClr>
+            </a:gs>
+            <a:gs pos="50000">
+              <a:schemeClr val="phClr">
+                <a:tint val="98000"/>
+                <a:satMod val="130000"/>
+                <a:shade val="90000"/>
+                <a:lumMod val="103000"/>
+              </a:schemeClr>
+            </a:gs>
+            <a:gs pos="100000">
+              <a:schemeClr val="phClr">
+                <a:shade val="63000"/>
+                <a:satMod val="120000"/>
+              </a:schemeClr>
+            </a:gs>
+          </a:gsLst>
+          <a:lin ang="5400000" scaled="0"/>
+        </a:gradFill>
+      </a:bgFillStyleLst>
+    </a:fmtScheme>
+  </a:themeElements>
+  <a:objectDefaults/>
+  <a:extraClrSchemeLst/>
+  <a:extLst>
+    <a:ext uri="{05A4C25C-085E-4340-85A3-A5531E510DB2}">
+      <thm15:themeFamily xmlns:thm15="http://schemas.microsoft.com/office/thememl/2012/main" name="Office Theme" id="{62F939B6-93AF-4DB8-9C6B-D6C7DFDC589F}" vid="{4A3C46E8-61CC-4603-A589-7422A47A8E4A}"/>
+    </a:ext>
+  </a:extLst>
+</a:theme>
 </file>